--- a/Slides/Slides-PPT/Exam 1 - Review A.pptx
+++ b/Slides/Slides-PPT/Exam 1 - Review A.pptx
@@ -6,42 +6,43 @@
     <p:sldMasterId id="2147483672" r:id="rId2"/>
   </p:sldMasterIdLst>
   <p:notesMasterIdLst>
-    <p:notesMasterId r:id="rId36"/>
+    <p:notesMasterId r:id="rId37"/>
   </p:notesMasterIdLst>
   <p:sldIdLst>
     <p:sldId id="268" r:id="rId3"/>
     <p:sldId id="440" r:id="rId4"/>
     <p:sldId id="377" r:id="rId5"/>
     <p:sldId id="493" r:id="rId6"/>
-    <p:sldId id="406" r:id="rId7"/>
-    <p:sldId id="504" r:id="rId8"/>
-    <p:sldId id="505" r:id="rId9"/>
-    <p:sldId id="480" r:id="rId10"/>
-    <p:sldId id="494" r:id="rId11"/>
-    <p:sldId id="496" r:id="rId12"/>
-    <p:sldId id="497" r:id="rId13"/>
-    <p:sldId id="498" r:id="rId14"/>
-    <p:sldId id="499" r:id="rId15"/>
-    <p:sldId id="500" r:id="rId16"/>
-    <p:sldId id="501" r:id="rId17"/>
-    <p:sldId id="502" r:id="rId18"/>
-    <p:sldId id="506" r:id="rId19"/>
-    <p:sldId id="507" r:id="rId20"/>
-    <p:sldId id="508" r:id="rId21"/>
-    <p:sldId id="681" r:id="rId22"/>
-    <p:sldId id="682" r:id="rId23"/>
-    <p:sldId id="485" r:id="rId24"/>
-    <p:sldId id="487" r:id="rId25"/>
-    <p:sldId id="509" r:id="rId26"/>
-    <p:sldId id="486" r:id="rId27"/>
-    <p:sldId id="688" r:id="rId28"/>
-    <p:sldId id="690" r:id="rId29"/>
-    <p:sldId id="689" r:id="rId30"/>
-    <p:sldId id="684" r:id="rId31"/>
-    <p:sldId id="686" r:id="rId32"/>
-    <p:sldId id="685" r:id="rId33"/>
-    <p:sldId id="687" r:id="rId34"/>
-    <p:sldId id="394" r:id="rId35"/>
+    <p:sldId id="691" r:id="rId7"/>
+    <p:sldId id="406" r:id="rId8"/>
+    <p:sldId id="504" r:id="rId9"/>
+    <p:sldId id="505" r:id="rId10"/>
+    <p:sldId id="480" r:id="rId11"/>
+    <p:sldId id="494" r:id="rId12"/>
+    <p:sldId id="496" r:id="rId13"/>
+    <p:sldId id="497" r:id="rId14"/>
+    <p:sldId id="498" r:id="rId15"/>
+    <p:sldId id="499" r:id="rId16"/>
+    <p:sldId id="500" r:id="rId17"/>
+    <p:sldId id="501" r:id="rId18"/>
+    <p:sldId id="502" r:id="rId19"/>
+    <p:sldId id="506" r:id="rId20"/>
+    <p:sldId id="507" r:id="rId21"/>
+    <p:sldId id="508" r:id="rId22"/>
+    <p:sldId id="681" r:id="rId23"/>
+    <p:sldId id="682" r:id="rId24"/>
+    <p:sldId id="485" r:id="rId25"/>
+    <p:sldId id="487" r:id="rId26"/>
+    <p:sldId id="509" r:id="rId27"/>
+    <p:sldId id="486" r:id="rId28"/>
+    <p:sldId id="688" r:id="rId29"/>
+    <p:sldId id="690" r:id="rId30"/>
+    <p:sldId id="689" r:id="rId31"/>
+    <p:sldId id="684" r:id="rId32"/>
+    <p:sldId id="686" r:id="rId33"/>
+    <p:sldId id="685" r:id="rId34"/>
+    <p:sldId id="687" r:id="rId35"/>
+    <p:sldId id="394" r:id="rId36"/>
   </p:sldIdLst>
   <p:sldSz cx="12192000" cy="6858000"/>
   <p:notesSz cx="6858000" cy="9144000"/>
@@ -230,7 +231,7 @@
           <a:p>
             <a:fld id="{43386AF1-EF24-4659-9089-2771856A9EA2}" type="datetimeFigureOut">
               <a:rPr lang="en-US" smtClean="0"/>
-              <a:t>9/30/2025</a:t>
+              <a:t>2/24/2026</a:t>
             </a:fld>
             <a:endParaRPr lang="en-US"/>
           </a:p>
@@ -793,7 +794,7 @@
     </p:spTree>
     <p:extLst>
       <p:ext uri="{BB962C8B-B14F-4D97-AF65-F5344CB8AC3E}">
-        <p14:creationId xmlns:p14="http://schemas.microsoft.com/office/powerpoint/2010/main" val="876250993"/>
+        <p14:creationId xmlns:p14="http://schemas.microsoft.com/office/powerpoint/2010/main" val="3728816664"/>
       </p:ext>
     </p:extLst>
   </p:cSld>
@@ -944,7 +945,7 @@
     </p:spTree>
     <p:extLst>
       <p:ext uri="{BB962C8B-B14F-4D97-AF65-F5344CB8AC3E}">
-        <p14:creationId xmlns:p14="http://schemas.microsoft.com/office/powerpoint/2010/main" val="1072344791"/>
+        <p14:creationId xmlns:p14="http://schemas.microsoft.com/office/powerpoint/2010/main" val="876250993"/>
       </p:ext>
     </p:extLst>
   </p:cSld>
@@ -1095,7 +1096,7 @@
     </p:spTree>
     <p:extLst>
       <p:ext uri="{BB962C8B-B14F-4D97-AF65-F5344CB8AC3E}">
-        <p14:creationId xmlns:p14="http://schemas.microsoft.com/office/powerpoint/2010/main" val="3614317947"/>
+        <p14:creationId xmlns:p14="http://schemas.microsoft.com/office/powerpoint/2010/main" val="1072344791"/>
       </p:ext>
     </p:extLst>
   </p:cSld>
@@ -1246,7 +1247,7 @@
     </p:spTree>
     <p:extLst>
       <p:ext uri="{BB962C8B-B14F-4D97-AF65-F5344CB8AC3E}">
-        <p14:creationId xmlns:p14="http://schemas.microsoft.com/office/powerpoint/2010/main" val="2237797566"/>
+        <p14:creationId xmlns:p14="http://schemas.microsoft.com/office/powerpoint/2010/main" val="3614317947"/>
       </p:ext>
     </p:extLst>
   </p:cSld>
@@ -1397,7 +1398,7 @@
     </p:spTree>
     <p:extLst>
       <p:ext uri="{BB962C8B-B14F-4D97-AF65-F5344CB8AC3E}">
-        <p14:creationId xmlns:p14="http://schemas.microsoft.com/office/powerpoint/2010/main" val="4111444355"/>
+        <p14:creationId xmlns:p14="http://schemas.microsoft.com/office/powerpoint/2010/main" val="2237797566"/>
       </p:ext>
     </p:extLst>
   </p:cSld>
@@ -1548,7 +1549,7 @@
     </p:spTree>
     <p:extLst>
       <p:ext uri="{BB962C8B-B14F-4D97-AF65-F5344CB8AC3E}">
-        <p14:creationId xmlns:p14="http://schemas.microsoft.com/office/powerpoint/2010/main" val="3298322181"/>
+        <p14:creationId xmlns:p14="http://schemas.microsoft.com/office/powerpoint/2010/main" val="4111444355"/>
       </p:ext>
     </p:extLst>
   </p:cSld>
@@ -1699,7 +1700,7 @@
     </p:spTree>
     <p:extLst>
       <p:ext uri="{BB962C8B-B14F-4D97-AF65-F5344CB8AC3E}">
-        <p14:creationId xmlns:p14="http://schemas.microsoft.com/office/powerpoint/2010/main" val="3067095419"/>
+        <p14:creationId xmlns:p14="http://schemas.microsoft.com/office/powerpoint/2010/main" val="3298322181"/>
       </p:ext>
     </p:extLst>
   </p:cSld>
@@ -1850,7 +1851,7 @@
     </p:spTree>
     <p:extLst>
       <p:ext uri="{BB962C8B-B14F-4D97-AF65-F5344CB8AC3E}">
-        <p14:creationId xmlns:p14="http://schemas.microsoft.com/office/powerpoint/2010/main" val="1788011804"/>
+        <p14:creationId xmlns:p14="http://schemas.microsoft.com/office/powerpoint/2010/main" val="3067095419"/>
       </p:ext>
     </p:extLst>
   </p:cSld>
@@ -2001,7 +2002,7 @@
     </p:spTree>
     <p:extLst>
       <p:ext uri="{BB962C8B-B14F-4D97-AF65-F5344CB8AC3E}">
-        <p14:creationId xmlns:p14="http://schemas.microsoft.com/office/powerpoint/2010/main" val="3426796180"/>
+        <p14:creationId xmlns:p14="http://schemas.microsoft.com/office/powerpoint/2010/main" val="1788011804"/>
       </p:ext>
     </p:extLst>
   </p:cSld>
@@ -2152,7 +2153,7 @@
     </p:spTree>
     <p:extLst>
       <p:ext uri="{BB962C8B-B14F-4D97-AF65-F5344CB8AC3E}">
-        <p14:creationId xmlns:p14="http://schemas.microsoft.com/office/powerpoint/2010/main" val="91040651"/>
+        <p14:creationId xmlns:p14="http://schemas.microsoft.com/office/powerpoint/2010/main" val="3426796180"/>
       </p:ext>
     </p:extLst>
   </p:cSld>
@@ -2454,7 +2455,7 @@
     </p:spTree>
     <p:extLst>
       <p:ext uri="{BB962C8B-B14F-4D97-AF65-F5344CB8AC3E}">
-        <p14:creationId xmlns:p14="http://schemas.microsoft.com/office/powerpoint/2010/main" val="3737278891"/>
+        <p14:creationId xmlns:p14="http://schemas.microsoft.com/office/powerpoint/2010/main" val="91040651"/>
       </p:ext>
     </p:extLst>
   </p:cSld>
@@ -2605,7 +2606,7 @@
     </p:spTree>
     <p:extLst>
       <p:ext uri="{BB962C8B-B14F-4D97-AF65-F5344CB8AC3E}">
-        <p14:creationId xmlns:p14="http://schemas.microsoft.com/office/powerpoint/2010/main" val="595954518"/>
+        <p14:creationId xmlns:p14="http://schemas.microsoft.com/office/powerpoint/2010/main" val="3737278891"/>
       </p:ext>
     </p:extLst>
   </p:cSld>
@@ -2756,7 +2757,7 @@
     </p:spTree>
     <p:extLst>
       <p:ext uri="{BB962C8B-B14F-4D97-AF65-F5344CB8AC3E}">
-        <p14:creationId xmlns:p14="http://schemas.microsoft.com/office/powerpoint/2010/main" val="3998982496"/>
+        <p14:creationId xmlns:p14="http://schemas.microsoft.com/office/powerpoint/2010/main" val="595954518"/>
       </p:ext>
     </p:extLst>
   </p:cSld>
@@ -2907,7 +2908,7 @@
     </p:spTree>
     <p:extLst>
       <p:ext uri="{BB962C8B-B14F-4D97-AF65-F5344CB8AC3E}">
-        <p14:creationId xmlns:p14="http://schemas.microsoft.com/office/powerpoint/2010/main" val="1141541792"/>
+        <p14:creationId xmlns:p14="http://schemas.microsoft.com/office/powerpoint/2010/main" val="3998982496"/>
       </p:ext>
     </p:extLst>
   </p:cSld>
@@ -3058,7 +3059,7 @@
     </p:spTree>
     <p:extLst>
       <p:ext uri="{BB962C8B-B14F-4D97-AF65-F5344CB8AC3E}">
-        <p14:creationId xmlns:p14="http://schemas.microsoft.com/office/powerpoint/2010/main" val="2441855014"/>
+        <p14:creationId xmlns:p14="http://schemas.microsoft.com/office/powerpoint/2010/main" val="1141541792"/>
       </p:ext>
     </p:extLst>
   </p:cSld>
@@ -3209,7 +3210,7 @@
     </p:spTree>
     <p:extLst>
       <p:ext uri="{BB962C8B-B14F-4D97-AF65-F5344CB8AC3E}">
-        <p14:creationId xmlns:p14="http://schemas.microsoft.com/office/powerpoint/2010/main" val="3372863684"/>
+        <p14:creationId xmlns:p14="http://schemas.microsoft.com/office/powerpoint/2010/main" val="2441855014"/>
       </p:ext>
     </p:extLst>
   </p:cSld>
@@ -3224,13 +3225,7 @@
   <p:cSld>
     <p:spTree>
       <p:nvGrpSpPr>
-        <p:cNvPr id="1" name="">
-          <a:extLst>
-            <a:ext uri="{FF2B5EF4-FFF2-40B4-BE49-F238E27FC236}">
-              <a16:creationId xmlns:a16="http://schemas.microsoft.com/office/drawing/2014/main" id="{F1FC9B61-F069-091E-40CA-3B40AF64A4FA}"/>
-            </a:ext>
-          </a:extLst>
-        </p:cNvPr>
+        <p:cNvPr id="1" name=""/>
         <p:cNvGrpSpPr/>
         <p:nvPr/>
       </p:nvGrpSpPr>
@@ -3244,13 +3239,7 @@
       </p:grpSpPr>
       <p:sp>
         <p:nvSpPr>
-          <p:cNvPr id="2" name="Slide Image Placeholder 1">
-            <a:extLst>
-              <a:ext uri="{FF2B5EF4-FFF2-40B4-BE49-F238E27FC236}">
-                <a16:creationId xmlns:a16="http://schemas.microsoft.com/office/drawing/2014/main" id="{69AD06FB-9C88-8377-19FB-1CFF5EA1391D}"/>
-              </a:ext>
-            </a:extLst>
-          </p:cNvPr>
+          <p:cNvPr id="2" name="Slide Image Placeholder 1"/>
           <p:cNvSpPr>
             <a:spLocks noGrp="1" noRot="1" noChangeAspect="1"/>
           </p:cNvSpPr>
@@ -3262,13 +3251,7 @@
       </p:sp>
       <p:sp>
         <p:nvSpPr>
-          <p:cNvPr id="3" name="Notes Placeholder 2">
-            <a:extLst>
-              <a:ext uri="{FF2B5EF4-FFF2-40B4-BE49-F238E27FC236}">
-                <a16:creationId xmlns:a16="http://schemas.microsoft.com/office/drawing/2014/main" id="{2FC19E2E-4051-DC97-3ED5-CC796D440E0E}"/>
-              </a:ext>
-            </a:extLst>
-          </p:cNvPr>
+          <p:cNvPr id="3" name="Notes Placeholder 2"/>
           <p:cNvSpPr>
             <a:spLocks noGrp="1"/>
           </p:cNvSpPr>
@@ -3294,13 +3277,7 @@
       </p:sp>
       <p:sp>
         <p:nvSpPr>
-          <p:cNvPr id="4" name="Slide Number Placeholder 3">
-            <a:extLst>
-              <a:ext uri="{FF2B5EF4-FFF2-40B4-BE49-F238E27FC236}">
-                <a16:creationId xmlns:a16="http://schemas.microsoft.com/office/drawing/2014/main" id="{AD7CADB8-8989-063C-C59D-CF6112D3DD5F}"/>
-              </a:ext>
-            </a:extLst>
-          </p:cNvPr>
+          <p:cNvPr id="4" name="Slide Number Placeholder 3"/>
           <p:cNvSpPr>
             <a:spLocks noGrp="1"/>
           </p:cNvSpPr>
@@ -3384,7 +3361,7 @@
     </p:spTree>
     <p:extLst>
       <p:ext uri="{BB962C8B-B14F-4D97-AF65-F5344CB8AC3E}">
-        <p14:creationId xmlns:p14="http://schemas.microsoft.com/office/powerpoint/2010/main" val="3747576725"/>
+        <p14:creationId xmlns:p14="http://schemas.microsoft.com/office/powerpoint/2010/main" val="3372863684"/>
       </p:ext>
     </p:extLst>
   </p:cSld>
@@ -3402,7 +3379,7 @@
         <p:cNvPr id="1" name="">
           <a:extLst>
             <a:ext uri="{FF2B5EF4-FFF2-40B4-BE49-F238E27FC236}">
-              <a16:creationId xmlns:a16="http://schemas.microsoft.com/office/drawing/2014/main" id="{58A1E6EB-47E5-3D8F-806E-6D3ABF75492D}"/>
+              <a16:creationId xmlns:a16="http://schemas.microsoft.com/office/drawing/2014/main" id="{F1FC9B61-F069-091E-40CA-3B40AF64A4FA}"/>
             </a:ext>
           </a:extLst>
         </p:cNvPr>
@@ -3422,7 +3399,7 @@
           <p:cNvPr id="2" name="Slide Image Placeholder 1">
             <a:extLst>
               <a:ext uri="{FF2B5EF4-FFF2-40B4-BE49-F238E27FC236}">
-                <a16:creationId xmlns:a16="http://schemas.microsoft.com/office/drawing/2014/main" id="{09BD1E1D-26B8-4DD4-1D22-A733CAFEC05E}"/>
+                <a16:creationId xmlns:a16="http://schemas.microsoft.com/office/drawing/2014/main" id="{69AD06FB-9C88-8377-19FB-1CFF5EA1391D}"/>
               </a:ext>
             </a:extLst>
           </p:cNvPr>
@@ -3440,7 +3417,7 @@
           <p:cNvPr id="3" name="Notes Placeholder 2">
             <a:extLst>
               <a:ext uri="{FF2B5EF4-FFF2-40B4-BE49-F238E27FC236}">
-                <a16:creationId xmlns:a16="http://schemas.microsoft.com/office/drawing/2014/main" id="{2387A0C2-AEAD-A1F5-620B-F676A3226287}"/>
+                <a16:creationId xmlns:a16="http://schemas.microsoft.com/office/drawing/2014/main" id="{2FC19E2E-4051-DC97-3ED5-CC796D440E0E}"/>
               </a:ext>
             </a:extLst>
           </p:cNvPr>
@@ -3472,7 +3449,7 @@
           <p:cNvPr id="4" name="Slide Number Placeholder 3">
             <a:extLst>
               <a:ext uri="{FF2B5EF4-FFF2-40B4-BE49-F238E27FC236}">
-                <a16:creationId xmlns:a16="http://schemas.microsoft.com/office/drawing/2014/main" id="{C4A4F8B8-422C-1CC1-6896-5CE9BA249346}"/>
+                <a16:creationId xmlns:a16="http://schemas.microsoft.com/office/drawing/2014/main" id="{AD7CADB8-8989-063C-C59D-CF6112D3DD5F}"/>
               </a:ext>
             </a:extLst>
           </p:cNvPr>
@@ -3559,7 +3536,7 @@
     </p:spTree>
     <p:extLst>
       <p:ext uri="{BB962C8B-B14F-4D97-AF65-F5344CB8AC3E}">
-        <p14:creationId xmlns:p14="http://schemas.microsoft.com/office/powerpoint/2010/main" val="2132109679"/>
+        <p14:creationId xmlns:p14="http://schemas.microsoft.com/office/powerpoint/2010/main" val="3747576725"/>
       </p:ext>
     </p:extLst>
   </p:cSld>
@@ -3577,7 +3554,7 @@
         <p:cNvPr id="1" name="">
           <a:extLst>
             <a:ext uri="{FF2B5EF4-FFF2-40B4-BE49-F238E27FC236}">
-              <a16:creationId xmlns:a16="http://schemas.microsoft.com/office/drawing/2014/main" id="{27E3851A-28DE-1D37-691E-C40AF3C00FD2}"/>
+              <a16:creationId xmlns:a16="http://schemas.microsoft.com/office/drawing/2014/main" id="{58A1E6EB-47E5-3D8F-806E-6D3ABF75492D}"/>
             </a:ext>
           </a:extLst>
         </p:cNvPr>
@@ -3597,7 +3574,7 @@
           <p:cNvPr id="2" name="Slide Image Placeholder 1">
             <a:extLst>
               <a:ext uri="{FF2B5EF4-FFF2-40B4-BE49-F238E27FC236}">
-                <a16:creationId xmlns:a16="http://schemas.microsoft.com/office/drawing/2014/main" id="{26BDCFC6-C116-1055-08CD-36344CDCD59E}"/>
+                <a16:creationId xmlns:a16="http://schemas.microsoft.com/office/drawing/2014/main" id="{09BD1E1D-26B8-4DD4-1D22-A733CAFEC05E}"/>
               </a:ext>
             </a:extLst>
           </p:cNvPr>
@@ -3615,7 +3592,7 @@
           <p:cNvPr id="3" name="Notes Placeholder 2">
             <a:extLst>
               <a:ext uri="{FF2B5EF4-FFF2-40B4-BE49-F238E27FC236}">
-                <a16:creationId xmlns:a16="http://schemas.microsoft.com/office/drawing/2014/main" id="{194E23F2-9099-5C16-F684-A9F19247A78B}"/>
+                <a16:creationId xmlns:a16="http://schemas.microsoft.com/office/drawing/2014/main" id="{2387A0C2-AEAD-A1F5-620B-F676A3226287}"/>
               </a:ext>
             </a:extLst>
           </p:cNvPr>
@@ -3647,7 +3624,7 @@
           <p:cNvPr id="4" name="Slide Number Placeholder 3">
             <a:extLst>
               <a:ext uri="{FF2B5EF4-FFF2-40B4-BE49-F238E27FC236}">
-                <a16:creationId xmlns:a16="http://schemas.microsoft.com/office/drawing/2014/main" id="{90EDFD61-0969-DA35-AB64-B317AD46F257}"/>
+                <a16:creationId xmlns:a16="http://schemas.microsoft.com/office/drawing/2014/main" id="{C4A4F8B8-422C-1CC1-6896-5CE9BA249346}"/>
               </a:ext>
             </a:extLst>
           </p:cNvPr>
@@ -3734,7 +3711,7 @@
     </p:spTree>
     <p:extLst>
       <p:ext uri="{BB962C8B-B14F-4D97-AF65-F5344CB8AC3E}">
-        <p14:creationId xmlns:p14="http://schemas.microsoft.com/office/powerpoint/2010/main" val="658268153"/>
+        <p14:creationId xmlns:p14="http://schemas.microsoft.com/office/powerpoint/2010/main" val="2132109679"/>
       </p:ext>
     </p:extLst>
   </p:cSld>
@@ -3749,7 +3726,13 @@
   <p:cSld>
     <p:spTree>
       <p:nvGrpSpPr>
-        <p:cNvPr id="1" name=""/>
+        <p:cNvPr id="1" name="">
+          <a:extLst>
+            <a:ext uri="{FF2B5EF4-FFF2-40B4-BE49-F238E27FC236}">
+              <a16:creationId xmlns:a16="http://schemas.microsoft.com/office/drawing/2014/main" id="{27E3851A-28DE-1D37-691E-C40AF3C00FD2}"/>
+            </a:ext>
+          </a:extLst>
+        </p:cNvPr>
         <p:cNvGrpSpPr/>
         <p:nvPr/>
       </p:nvGrpSpPr>
@@ -3763,7 +3746,13 @@
       </p:grpSpPr>
       <p:sp>
         <p:nvSpPr>
-          <p:cNvPr id="2" name="Slide Image Placeholder 1"/>
+          <p:cNvPr id="2" name="Slide Image Placeholder 1">
+            <a:extLst>
+              <a:ext uri="{FF2B5EF4-FFF2-40B4-BE49-F238E27FC236}">
+                <a16:creationId xmlns:a16="http://schemas.microsoft.com/office/drawing/2014/main" id="{26BDCFC6-C116-1055-08CD-36344CDCD59E}"/>
+              </a:ext>
+            </a:extLst>
+          </p:cNvPr>
           <p:cNvSpPr>
             <a:spLocks noGrp="1" noRot="1" noChangeAspect="1"/>
           </p:cNvSpPr>
@@ -3775,7 +3764,13 @@
       </p:sp>
       <p:sp>
         <p:nvSpPr>
-          <p:cNvPr id="3" name="Notes Placeholder 2"/>
+          <p:cNvPr id="3" name="Notes Placeholder 2">
+            <a:extLst>
+              <a:ext uri="{FF2B5EF4-FFF2-40B4-BE49-F238E27FC236}">
+                <a16:creationId xmlns:a16="http://schemas.microsoft.com/office/drawing/2014/main" id="{194E23F2-9099-5C16-F684-A9F19247A78B}"/>
+              </a:ext>
+            </a:extLst>
+          </p:cNvPr>
           <p:cNvSpPr>
             <a:spLocks noGrp="1"/>
           </p:cNvSpPr>
@@ -3801,7 +3796,13 @@
       </p:sp>
       <p:sp>
         <p:nvSpPr>
-          <p:cNvPr id="4" name="Slide Number Placeholder 3"/>
+          <p:cNvPr id="4" name="Slide Number Placeholder 3">
+            <a:extLst>
+              <a:ext uri="{FF2B5EF4-FFF2-40B4-BE49-F238E27FC236}">
+                <a16:creationId xmlns:a16="http://schemas.microsoft.com/office/drawing/2014/main" id="{90EDFD61-0969-DA35-AB64-B317AD46F257}"/>
+              </a:ext>
+            </a:extLst>
+          </p:cNvPr>
           <p:cNvSpPr>
             <a:spLocks noGrp="1"/>
           </p:cNvSpPr>
@@ -3885,7 +3886,7 @@
     </p:spTree>
     <p:extLst>
       <p:ext uri="{BB962C8B-B14F-4D97-AF65-F5344CB8AC3E}">
-        <p14:creationId xmlns:p14="http://schemas.microsoft.com/office/powerpoint/2010/main" val="2467873718"/>
+        <p14:creationId xmlns:p14="http://schemas.microsoft.com/office/powerpoint/2010/main" val="658268153"/>
       </p:ext>
     </p:extLst>
   </p:cSld>
@@ -4129,7 +4130,7 @@
     </p:spTree>
     <p:extLst>
       <p:ext uri="{BB962C8B-B14F-4D97-AF65-F5344CB8AC3E}">
-        <p14:creationId xmlns:p14="http://schemas.microsoft.com/office/powerpoint/2010/main" val="1868775921"/>
+        <p14:creationId xmlns:p14="http://schemas.microsoft.com/office/powerpoint/2010/main" val="2467873718"/>
       </p:ext>
     </p:extLst>
   </p:cSld>
@@ -4280,7 +4281,7 @@
     </p:spTree>
     <p:extLst>
       <p:ext uri="{BB962C8B-B14F-4D97-AF65-F5344CB8AC3E}">
-        <p14:creationId xmlns:p14="http://schemas.microsoft.com/office/powerpoint/2010/main" val="554930333"/>
+        <p14:creationId xmlns:p14="http://schemas.microsoft.com/office/powerpoint/2010/main" val="1868775921"/>
       </p:ext>
     </p:extLst>
   </p:cSld>
@@ -4431,7 +4432,7 @@
     </p:spTree>
     <p:extLst>
       <p:ext uri="{BB962C8B-B14F-4D97-AF65-F5344CB8AC3E}">
-        <p14:creationId xmlns:p14="http://schemas.microsoft.com/office/powerpoint/2010/main" val="3059179596"/>
+        <p14:creationId xmlns:p14="http://schemas.microsoft.com/office/powerpoint/2010/main" val="554930333"/>
       </p:ext>
     </p:extLst>
   </p:cSld>
@@ -4486,8 +4487,12 @@
           <a:lstStyle/>
           <a:p>
             <a:r>
+              <a:rPr lang="en-US" dirty="0" err="1"/>
+              <a:t>Psuedocode</a:t>
+            </a:r>
+            <a:r>
               <a:rPr lang="en-US" dirty="0"/>
-              <a:t>Space: O1, Time n2</a:t>
+              <a:t> and code</a:t>
             </a:r>
           </a:p>
         </p:txBody>
@@ -4578,6 +4583,153 @@
     </p:spTree>
     <p:extLst>
       <p:ext uri="{BB962C8B-B14F-4D97-AF65-F5344CB8AC3E}">
+        <p14:creationId xmlns:p14="http://schemas.microsoft.com/office/powerpoint/2010/main" val="3059179596"/>
+      </p:ext>
+    </p:extLst>
+  </p:cSld>
+  <p:clrMapOvr>
+    <a:masterClrMapping/>
+  </p:clrMapOvr>
+</p:notes>
+</file>
+
+<file path=ppt/notesSlides/notesSlide34.xml><?xml version="1.0" encoding="utf-8"?>
+<p:notes xmlns:a="http://schemas.openxmlformats.org/drawingml/2006/main" xmlns:r="http://schemas.openxmlformats.org/officeDocument/2006/relationships" xmlns:p="http://schemas.openxmlformats.org/presentationml/2006/main">
+  <p:cSld>
+    <p:spTree>
+      <p:nvGrpSpPr>
+        <p:cNvPr id="1" name=""/>
+        <p:cNvGrpSpPr/>
+        <p:nvPr/>
+      </p:nvGrpSpPr>
+      <p:grpSpPr>
+        <a:xfrm>
+          <a:off x="0" y="0"/>
+          <a:ext cx="0" cy="0"/>
+          <a:chOff x="0" y="0"/>
+          <a:chExt cx="0" cy="0"/>
+        </a:xfrm>
+      </p:grpSpPr>
+      <p:sp>
+        <p:nvSpPr>
+          <p:cNvPr id="2" name="Slide Image Placeholder 1"/>
+          <p:cNvSpPr>
+            <a:spLocks noGrp="1" noRot="1" noChangeAspect="1"/>
+          </p:cNvSpPr>
+          <p:nvPr>
+            <p:ph type="sldImg"/>
+          </p:nvPr>
+        </p:nvSpPr>
+        <p:spPr/>
+      </p:sp>
+      <p:sp>
+        <p:nvSpPr>
+          <p:cNvPr id="3" name="Notes Placeholder 2"/>
+          <p:cNvSpPr>
+            <a:spLocks noGrp="1"/>
+          </p:cNvSpPr>
+          <p:nvPr>
+            <p:ph type="body" idx="1"/>
+          </p:nvPr>
+        </p:nvSpPr>
+        <p:spPr/>
+        <p:txBody>
+          <a:bodyPr/>
+          <a:lstStyle/>
+          <a:p>
+            <a:r>
+              <a:rPr lang="en-US" dirty="0"/>
+              <a:t>Space: O1, Time n2</a:t>
+            </a:r>
+          </a:p>
+        </p:txBody>
+      </p:sp>
+      <p:sp>
+        <p:nvSpPr>
+          <p:cNvPr id="4" name="Slide Number Placeholder 3"/>
+          <p:cNvSpPr>
+            <a:spLocks noGrp="1"/>
+          </p:cNvSpPr>
+          <p:nvPr>
+            <p:ph type="sldNum" sz="quarter" idx="5"/>
+          </p:nvPr>
+        </p:nvSpPr>
+        <p:spPr/>
+        <p:txBody>
+          <a:bodyPr/>
+          <a:lstStyle/>
+          <a:p>
+            <a:pPr marL="0" marR="0" lvl="0" indent="0" algn="r" defTabSz="914400" rtl="0" eaLnBrk="1" fontAlgn="auto" latinLnBrk="0" hangingPunct="1">
+              <a:lnSpc>
+                <a:spcPct val="100000"/>
+              </a:lnSpc>
+              <a:spcBef>
+                <a:spcPts val="0"/>
+              </a:spcBef>
+              <a:spcAft>
+                <a:spcPts val="0"/>
+              </a:spcAft>
+              <a:buClrTx/>
+              <a:buSzTx/>
+              <a:buFontTx/>
+              <a:buNone/>
+              <a:tabLst/>
+              <a:defRPr/>
+            </a:pPr>
+            <a:fld id="{E2B3017C-A127-4C06-BF43-1875A8859C4B}" type="slidenum">
+              <a:rPr kumimoji="0" lang="en-US" sz="1200" b="0" i="0" u="none" strike="noStrike" kern="1200" cap="none" spc="0" normalizeH="0" baseline="0" noProof="0" smtClean="0">
+                <a:ln>
+                  <a:noFill/>
+                </a:ln>
+                <a:solidFill>
+                  <a:prstClr val="black"/>
+                </a:solidFill>
+                <a:effectLst/>
+                <a:uLnTx/>
+                <a:uFillTx/>
+                <a:latin typeface="Calibri" panose="020F0502020204030204"/>
+                <a:ea typeface="+mn-ea"/>
+                <a:cs typeface="+mn-cs"/>
+              </a:rPr>
+              <a:pPr marL="0" marR="0" lvl="0" indent="0" algn="r" defTabSz="914400" rtl="0" eaLnBrk="1" fontAlgn="auto" latinLnBrk="0" hangingPunct="1">
+                <a:lnSpc>
+                  <a:spcPct val="100000"/>
+                </a:lnSpc>
+                <a:spcBef>
+                  <a:spcPts val="0"/>
+                </a:spcBef>
+                <a:spcAft>
+                  <a:spcPts val="0"/>
+                </a:spcAft>
+                <a:buClrTx/>
+                <a:buSzTx/>
+                <a:buFontTx/>
+                <a:buNone/>
+                <a:tabLst/>
+                <a:defRPr/>
+              </a:pPr>
+              <a:t>34</a:t>
+            </a:fld>
+            <a:endParaRPr kumimoji="0" lang="en-US" sz="1200" b="0" i="0" u="none" strike="noStrike" kern="1200" cap="none" spc="0" normalizeH="0" baseline="0" noProof="0">
+              <a:ln>
+                <a:noFill/>
+              </a:ln>
+              <a:solidFill>
+                <a:prstClr val="black"/>
+              </a:solidFill>
+              <a:effectLst/>
+              <a:uLnTx/>
+              <a:uFillTx/>
+              <a:latin typeface="Calibri" panose="020F0502020204030204"/>
+              <a:ea typeface="+mn-ea"/>
+              <a:cs typeface="+mn-cs"/>
+            </a:endParaRPr>
+          </a:p>
+        </p:txBody>
+      </p:sp>
+    </p:spTree>
+    <p:extLst>
+      <p:ext uri="{BB962C8B-B14F-4D97-AF65-F5344CB8AC3E}">
         <p14:creationId xmlns:p14="http://schemas.microsoft.com/office/powerpoint/2010/main" val="1422712198"/>
       </p:ext>
     </p:extLst>
@@ -4686,7 +4838,13 @@
   <p:cSld>
     <p:spTree>
       <p:nvGrpSpPr>
-        <p:cNvPr id="1" name=""/>
+        <p:cNvPr id="1" name="">
+          <a:extLst>
+            <a:ext uri="{FF2B5EF4-FFF2-40B4-BE49-F238E27FC236}">
+              <a16:creationId xmlns:a16="http://schemas.microsoft.com/office/drawing/2014/main" id="{3C8FBBC6-E3B5-D2D4-5CD2-57C825FDEE9F}"/>
+            </a:ext>
+          </a:extLst>
+        </p:cNvPr>
         <p:cNvGrpSpPr/>
         <p:nvPr/>
       </p:nvGrpSpPr>
@@ -4700,7 +4858,13 @@
       </p:grpSpPr>
       <p:sp>
         <p:nvSpPr>
-          <p:cNvPr id="2" name="Slide Image Placeholder 1"/>
+          <p:cNvPr id="2" name="Slide Image Placeholder 1">
+            <a:extLst>
+              <a:ext uri="{FF2B5EF4-FFF2-40B4-BE49-F238E27FC236}">
+                <a16:creationId xmlns:a16="http://schemas.microsoft.com/office/drawing/2014/main" id="{5A0ACCBE-2350-1932-3534-AE296B00744E}"/>
+              </a:ext>
+            </a:extLst>
+          </p:cNvPr>
           <p:cNvSpPr>
             <a:spLocks noGrp="1" noRot="1" noChangeAspect="1"/>
           </p:cNvSpPr>
@@ -4712,7 +4876,13 @@
       </p:sp>
       <p:sp>
         <p:nvSpPr>
-          <p:cNvPr id="3" name="Notes Placeholder 2"/>
+          <p:cNvPr id="3" name="Notes Placeholder 2">
+            <a:extLst>
+              <a:ext uri="{FF2B5EF4-FFF2-40B4-BE49-F238E27FC236}">
+                <a16:creationId xmlns:a16="http://schemas.microsoft.com/office/drawing/2014/main" id="{C105B156-75CE-7E7E-7889-B308538BEEF1}"/>
+              </a:ext>
+            </a:extLst>
+          </p:cNvPr>
           <p:cNvSpPr>
             <a:spLocks noGrp="1"/>
           </p:cNvSpPr>
@@ -4726,19 +4896,27 @@
           <a:lstStyle/>
           <a:p>
             <a:r>
-              <a:rPr lang="en-US" dirty="0" err="1"/>
-              <a:t>Psuedocode</a:t>
-            </a:r>
-            <a:r>
               <a:rPr lang="en-US" dirty="0"/>
-              <a:t> and code</a:t>
-            </a:r>
-          </a:p>
-        </p:txBody>
-      </p:sp>
-      <p:sp>
-        <p:nvSpPr>
-          <p:cNvPr id="4" name="Slide Number Placeholder 3"/>
+              <a:t>Discussed, touched upon, went over, covered</a:t>
+            </a:r>
+          </a:p>
+          <a:p>
+            <a:r>
+              <a:rPr lang="en-US" dirty="0"/>
+              <a:t>Emerges out of the limitations offered by our second approach</a:t>
+            </a:r>
+          </a:p>
+        </p:txBody>
+      </p:sp>
+      <p:sp>
+        <p:nvSpPr>
+          <p:cNvPr id="4" name="Slide Number Placeholder 3">
+            <a:extLst>
+              <a:ext uri="{FF2B5EF4-FFF2-40B4-BE49-F238E27FC236}">
+                <a16:creationId xmlns:a16="http://schemas.microsoft.com/office/drawing/2014/main" id="{0C97CAF3-6029-94D9-2368-66F9D3141EA9}"/>
+              </a:ext>
+            </a:extLst>
+          </p:cNvPr>
           <p:cNvSpPr>
             <a:spLocks noGrp="1"/>
           </p:cNvSpPr>
@@ -4751,78 +4929,18 @@
           <a:bodyPr/>
           <a:lstStyle/>
           <a:p>
-            <a:pPr marL="0" marR="0" lvl="0" indent="0" algn="r" defTabSz="914400" rtl="0" eaLnBrk="1" fontAlgn="auto" latinLnBrk="0" hangingPunct="1">
-              <a:lnSpc>
-                <a:spcPct val="100000"/>
-              </a:lnSpc>
-              <a:spcBef>
-                <a:spcPts val="0"/>
-              </a:spcBef>
-              <a:spcAft>
-                <a:spcPts val="0"/>
-              </a:spcAft>
-              <a:buClrTx/>
-              <a:buSzTx/>
-              <a:buFontTx/>
-              <a:buNone/>
-              <a:tabLst/>
-              <a:defRPr/>
-            </a:pPr>
             <a:fld id="{E2B3017C-A127-4C06-BF43-1875A8859C4B}" type="slidenum">
-              <a:rPr kumimoji="0" lang="en-US" sz="1200" b="0" i="0" u="none" strike="noStrike" kern="1200" cap="none" spc="0" normalizeH="0" baseline="0" noProof="0" smtClean="0">
-                <a:ln>
-                  <a:noFill/>
-                </a:ln>
-                <a:solidFill>
-                  <a:prstClr val="black"/>
-                </a:solidFill>
-                <a:effectLst/>
-                <a:uLnTx/>
-                <a:uFillTx/>
-                <a:latin typeface="Calibri" panose="020F0502020204030204"/>
-                <a:ea typeface="+mn-ea"/>
-                <a:cs typeface="+mn-cs"/>
-              </a:rPr>
-              <a:pPr marL="0" marR="0" lvl="0" indent="0" algn="r" defTabSz="914400" rtl="0" eaLnBrk="1" fontAlgn="auto" latinLnBrk="0" hangingPunct="1">
-                <a:lnSpc>
-                  <a:spcPct val="100000"/>
-                </a:lnSpc>
-                <a:spcBef>
-                  <a:spcPts val="0"/>
-                </a:spcBef>
-                <a:spcAft>
-                  <a:spcPts val="0"/>
-                </a:spcAft>
-                <a:buClrTx/>
-                <a:buSzTx/>
-                <a:buFontTx/>
-                <a:buNone/>
-                <a:tabLst/>
-                <a:defRPr/>
-              </a:pPr>
+              <a:rPr lang="en-US" smtClean="0"/>
               <a:t>5</a:t>
             </a:fld>
-            <a:endParaRPr kumimoji="0" lang="en-US" sz="1200" b="0" i="0" u="none" strike="noStrike" kern="1200" cap="none" spc="0" normalizeH="0" baseline="0" noProof="0">
-              <a:ln>
-                <a:noFill/>
-              </a:ln>
-              <a:solidFill>
-                <a:prstClr val="black"/>
-              </a:solidFill>
-              <a:effectLst/>
-              <a:uLnTx/>
-              <a:uFillTx/>
-              <a:latin typeface="Calibri" panose="020F0502020204030204"/>
-              <a:ea typeface="+mn-ea"/>
-              <a:cs typeface="+mn-cs"/>
-            </a:endParaRPr>
+            <a:endParaRPr lang="en-US"/>
           </a:p>
         </p:txBody>
       </p:sp>
     </p:spTree>
     <p:extLst>
       <p:ext uri="{BB962C8B-B14F-4D97-AF65-F5344CB8AC3E}">
-        <p14:creationId xmlns:p14="http://schemas.microsoft.com/office/powerpoint/2010/main" val="1599246421"/>
+        <p14:creationId xmlns:p14="http://schemas.microsoft.com/office/powerpoint/2010/main" val="1581212327"/>
       </p:ext>
     </p:extLst>
   </p:cSld>
@@ -4973,7 +5091,7 @@
     </p:spTree>
     <p:extLst>
       <p:ext uri="{BB962C8B-B14F-4D97-AF65-F5344CB8AC3E}">
-        <p14:creationId xmlns:p14="http://schemas.microsoft.com/office/powerpoint/2010/main" val="933738657"/>
+        <p14:creationId xmlns:p14="http://schemas.microsoft.com/office/powerpoint/2010/main" val="1599246421"/>
       </p:ext>
     </p:extLst>
   </p:cSld>
@@ -5124,7 +5242,7 @@
     </p:spTree>
     <p:extLst>
       <p:ext uri="{BB962C8B-B14F-4D97-AF65-F5344CB8AC3E}">
-        <p14:creationId xmlns:p14="http://schemas.microsoft.com/office/powerpoint/2010/main" val="1723869126"/>
+        <p14:creationId xmlns:p14="http://schemas.microsoft.com/office/powerpoint/2010/main" val="933738657"/>
       </p:ext>
     </p:extLst>
   </p:cSld>
@@ -5275,7 +5393,7 @@
     </p:spTree>
     <p:extLst>
       <p:ext uri="{BB962C8B-B14F-4D97-AF65-F5344CB8AC3E}">
-        <p14:creationId xmlns:p14="http://schemas.microsoft.com/office/powerpoint/2010/main" val="6819268"/>
+        <p14:creationId xmlns:p14="http://schemas.microsoft.com/office/powerpoint/2010/main" val="1723869126"/>
       </p:ext>
     </p:extLst>
   </p:cSld>
@@ -5426,7 +5544,7 @@
     </p:spTree>
     <p:extLst>
       <p:ext uri="{BB962C8B-B14F-4D97-AF65-F5344CB8AC3E}">
-        <p14:creationId xmlns:p14="http://schemas.microsoft.com/office/powerpoint/2010/main" val="3728816664"/>
+        <p14:creationId xmlns:p14="http://schemas.microsoft.com/office/powerpoint/2010/main" val="6819268"/>
       </p:ext>
     </p:extLst>
   </p:cSld>
@@ -5567,7 +5685,7 @@
           <a:p>
             <a:fld id="{F8616885-9ED8-4298-9149-C5A410E7F61A}" type="datetime1">
               <a:rPr lang="en-US" smtClean="0"/>
-              <a:t>9/30/2025</a:t>
+              <a:t>2/24/2026</a:t>
             </a:fld>
             <a:endParaRPr lang="en-US"/>
           </a:p>
@@ -5737,7 +5855,7 @@
           <a:p>
             <a:fld id="{46647952-6535-4065-B4F6-C94B3D00772F}" type="datetime1">
               <a:rPr lang="en-US" smtClean="0"/>
-              <a:t>9/30/2025</a:t>
+              <a:t>2/24/2026</a:t>
             </a:fld>
             <a:endParaRPr lang="en-US"/>
           </a:p>
@@ -5917,7 +6035,7 @@
           <a:p>
             <a:fld id="{63870D39-F97D-4ECC-909C-35255E9A37F7}" type="datetime1">
               <a:rPr lang="en-US" smtClean="0"/>
-              <a:t>9/30/2025</a:t>
+              <a:t>2/24/2026</a:t>
             </a:fld>
             <a:endParaRPr lang="en-US"/>
           </a:p>
@@ -6109,7 +6227,7 @@
           <a:p>
             <a:fld id="{38C9C2D7-406E-45EE-9F57-B83131B49240}" type="datetimeFigureOut">
               <a:rPr lang="en-US" smtClean="0"/>
-              <a:t>9/30/2025</a:t>
+              <a:t>2/24/2026</a:t>
             </a:fld>
             <a:endParaRPr lang="en-US"/>
           </a:p>
@@ -6279,7 +6397,7 @@
           <a:p>
             <a:fld id="{38C9C2D7-406E-45EE-9F57-B83131B49240}" type="datetimeFigureOut">
               <a:rPr lang="en-US" smtClean="0"/>
-              <a:t>9/30/2025</a:t>
+              <a:t>2/24/2026</a:t>
             </a:fld>
             <a:endParaRPr lang="en-US"/>
           </a:p>
@@ -6525,7 +6643,7 @@
           <a:p>
             <a:fld id="{38C9C2D7-406E-45EE-9F57-B83131B49240}" type="datetimeFigureOut">
               <a:rPr lang="en-US" smtClean="0"/>
-              <a:t>9/30/2025</a:t>
+              <a:t>2/24/2026</a:t>
             </a:fld>
             <a:endParaRPr lang="en-US"/>
           </a:p>
@@ -6757,7 +6875,7 @@
           <a:p>
             <a:fld id="{38C9C2D7-406E-45EE-9F57-B83131B49240}" type="datetimeFigureOut">
               <a:rPr lang="en-US" smtClean="0"/>
-              <a:t>9/30/2025</a:t>
+              <a:t>2/24/2026</a:t>
             </a:fld>
             <a:endParaRPr lang="en-US"/>
           </a:p>
@@ -7124,7 +7242,7 @@
           <a:p>
             <a:fld id="{38C9C2D7-406E-45EE-9F57-B83131B49240}" type="datetimeFigureOut">
               <a:rPr lang="en-US" smtClean="0"/>
-              <a:t>9/30/2025</a:t>
+              <a:t>2/24/2026</a:t>
             </a:fld>
             <a:endParaRPr lang="en-US"/>
           </a:p>
@@ -7242,7 +7360,7 @@
           <a:p>
             <a:fld id="{38C9C2D7-406E-45EE-9F57-B83131B49240}" type="datetimeFigureOut">
               <a:rPr lang="en-US" smtClean="0"/>
-              <a:t>9/30/2025</a:t>
+              <a:t>2/24/2026</a:t>
             </a:fld>
             <a:endParaRPr lang="en-US"/>
           </a:p>
@@ -7337,7 +7455,7 @@
           <a:p>
             <a:fld id="{38C9C2D7-406E-45EE-9F57-B83131B49240}" type="datetimeFigureOut">
               <a:rPr lang="en-US" smtClean="0"/>
-              <a:t>9/30/2025</a:t>
+              <a:t>2/24/2026</a:t>
             </a:fld>
             <a:endParaRPr lang="en-US"/>
           </a:p>
@@ -7614,7 +7732,7 @@
           <a:p>
             <a:fld id="{38C9C2D7-406E-45EE-9F57-B83131B49240}" type="datetimeFigureOut">
               <a:rPr lang="en-US" smtClean="0"/>
-              <a:t>9/30/2025</a:t>
+              <a:t>2/24/2026</a:t>
             </a:fld>
             <a:endParaRPr lang="en-US"/>
           </a:p>
@@ -7784,7 +7902,7 @@
           <a:p>
             <a:fld id="{7325EFF0-82F5-4880-81B9-BC73A963ECC3}" type="datetime1">
               <a:rPr lang="en-US" smtClean="0"/>
-              <a:t>9/30/2025</a:t>
+              <a:t>2/24/2026</a:t>
             </a:fld>
             <a:endParaRPr lang="en-US"/>
           </a:p>
@@ -8041,7 +8159,7 @@
           <a:p>
             <a:fld id="{38C9C2D7-406E-45EE-9F57-B83131B49240}" type="datetimeFigureOut">
               <a:rPr lang="en-US" smtClean="0"/>
-              <a:t>9/30/2025</a:t>
+              <a:t>2/24/2026</a:t>
             </a:fld>
             <a:endParaRPr lang="en-US"/>
           </a:p>
@@ -8211,7 +8329,7 @@
           <a:p>
             <a:fld id="{38C9C2D7-406E-45EE-9F57-B83131B49240}" type="datetimeFigureOut">
               <a:rPr lang="en-US" smtClean="0"/>
-              <a:t>9/30/2025</a:t>
+              <a:t>2/24/2026</a:t>
             </a:fld>
             <a:endParaRPr lang="en-US"/>
           </a:p>
@@ -8391,7 +8509,7 @@
           <a:p>
             <a:fld id="{38C9C2D7-406E-45EE-9F57-B83131B49240}" type="datetimeFigureOut">
               <a:rPr lang="en-US" smtClean="0"/>
-              <a:t>9/30/2025</a:t>
+              <a:t>2/24/2026</a:t>
             </a:fld>
             <a:endParaRPr lang="en-US"/>
           </a:p>
@@ -8637,7 +8755,7 @@
           <a:p>
             <a:fld id="{5A946811-681C-4AC5-84B7-A52FB525DDA0}" type="datetime1">
               <a:rPr lang="en-US" smtClean="0"/>
-              <a:t>9/30/2025</a:t>
+              <a:t>2/24/2026</a:t>
             </a:fld>
             <a:endParaRPr lang="en-US"/>
           </a:p>
@@ -8869,7 +8987,7 @@
           <a:p>
             <a:fld id="{B26718EC-8AAB-4CFD-80CE-1D0FB821064C}" type="datetime1">
               <a:rPr lang="en-US" smtClean="0"/>
-              <a:t>9/30/2025</a:t>
+              <a:t>2/24/2026</a:t>
             </a:fld>
             <a:endParaRPr lang="en-US"/>
           </a:p>
@@ -9236,7 +9354,7 @@
           <a:p>
             <a:fld id="{B9FC400D-05DF-4711-8592-640F86665B5F}" type="datetime1">
               <a:rPr lang="en-US" smtClean="0"/>
-              <a:t>9/30/2025</a:t>
+              <a:t>2/24/2026</a:t>
             </a:fld>
             <a:endParaRPr lang="en-US"/>
           </a:p>
@@ -9354,7 +9472,7 @@
           <a:p>
             <a:fld id="{21DCA921-A295-445C-9DF4-D32E11171EBC}" type="datetime1">
               <a:rPr lang="en-US" smtClean="0"/>
-              <a:t>9/30/2025</a:t>
+              <a:t>2/24/2026</a:t>
             </a:fld>
             <a:endParaRPr lang="en-US"/>
           </a:p>
@@ -9449,7 +9567,7 @@
           <a:p>
             <a:fld id="{410F1947-2C73-49DA-BF00-06FEB90FBFE0}" type="datetime1">
               <a:rPr lang="en-US" smtClean="0"/>
-              <a:t>9/30/2025</a:t>
+              <a:t>2/24/2026</a:t>
             </a:fld>
             <a:endParaRPr lang="en-US"/>
           </a:p>
@@ -9726,7 +9844,7 @@
           <a:p>
             <a:fld id="{7909FA88-D630-40A8-A7C1-451FFA95718D}" type="datetime1">
               <a:rPr lang="en-US" smtClean="0"/>
-              <a:t>9/30/2025</a:t>
+              <a:t>2/24/2026</a:t>
             </a:fld>
             <a:endParaRPr lang="en-US"/>
           </a:p>
@@ -9983,7 +10101,7 @@
           <a:p>
             <a:fld id="{0B22107A-0A76-4A69-98CE-85E509F6FEC6}" type="datetime1">
               <a:rPr lang="en-US" smtClean="0"/>
-              <a:t>9/30/2025</a:t>
+              <a:t>2/24/2026</a:t>
             </a:fld>
             <a:endParaRPr lang="en-US"/>
           </a:p>
@@ -10196,7 +10314,7 @@
           <a:p>
             <a:fld id="{BFC3CE7D-A49F-42F1-B54B-0205BF41E480}" type="datetime1">
               <a:rPr lang="en-US" smtClean="0"/>
-              <a:t>9/30/2025</a:t>
+              <a:t>2/24/2026</a:t>
             </a:fld>
             <a:endParaRPr lang="en-US"/>
           </a:p>
@@ -10737,7 +10855,7 @@
           <a:p>
             <a:fld id="{38C9C2D7-406E-45EE-9F57-B83131B49240}" type="datetimeFigureOut">
               <a:rPr lang="en-US" smtClean="0"/>
-              <a:t>9/30/2025</a:t>
+              <a:t>2/24/2026</a:t>
             </a:fld>
             <a:endParaRPr lang="en-US"/>
           </a:p>
@@ -11366,13 +11484,22 @@
           </a:p>
           <a:p>
             <a:r>
+              <a:rPr lang="en-US" sz="2000" dirty="0" err="1">
+                <a:solidFill>
+                  <a:srgbClr val="EB6E19"/>
+                </a:solidFill>
+                <a:latin typeface="Consolas" panose="020B0609020204030204" pitchFamily="49" charset="0"/>
+              </a:rPr>
+              <a:t>int</a:t>
+            </a:r>
+            <a:r>
               <a:rPr lang="en-US" sz="2000" dirty="0">
                 <a:solidFill>
                   <a:srgbClr val="EB6E19"/>
                 </a:solidFill>
                 <a:latin typeface="Consolas" panose="020B0609020204030204" pitchFamily="49" charset="0"/>
               </a:rPr>
-              <a:t>int i = 1;</a:t>
+              <a:t> k;</a:t>
             </a:r>
           </a:p>
           <a:p>
@@ -11383,7 +11510,7 @@
                 </a:solidFill>
                 <a:latin typeface="Consolas" panose="020B0609020204030204" pitchFamily="49" charset="0"/>
               </a:rPr>
-              <a:t>while (i &lt; n)</a:t>
+              <a:t>for (int i=1; i &lt; n; i++)</a:t>
             </a:r>
           </a:p>
           <a:p>
@@ -11394,10 +11521,17 @@
                 </a:solidFill>
                 <a:latin typeface="Consolas" panose="020B0609020204030204" pitchFamily="49" charset="0"/>
               </a:rPr>
-              <a:t>{</a:t>
-            </a:r>
-          </a:p>
-          <a:p>
+              <a:t>	for (</a:t>
+            </a:r>
+            <a:r>
+              <a:rPr lang="en-US" sz="2000" dirty="0" err="1">
+                <a:solidFill>
+                  <a:srgbClr val="EB6E19"/>
+                </a:solidFill>
+                <a:latin typeface="Consolas" panose="020B0609020204030204" pitchFamily="49" charset="0"/>
+              </a:rPr>
+              <a:t>int</a:t>
+            </a:r>
             <a:r>
               <a:rPr lang="en-US" sz="2000" dirty="0">
                 <a:solidFill>
@@ -11405,7 +11539,7 @@
                 </a:solidFill>
                 <a:latin typeface="Consolas" panose="020B0609020204030204" pitchFamily="49" charset="0"/>
               </a:rPr>
-              <a:t>   i = i * m;</a:t>
+              <a:t> j=n; j&gt;1; j=j/2)</a:t>
             </a:r>
           </a:p>
           <a:p>
@@ -11416,7 +11550,7 @@
                 </a:solidFill>
                 <a:latin typeface="Consolas" panose="020B0609020204030204" pitchFamily="49" charset="0"/>
               </a:rPr>
-              <a:t>}</a:t>
+              <a:t>		k = i*j;</a:t>
             </a:r>
           </a:p>
           <a:p>
@@ -11443,12 +11577,41 @@
               <a:latin typeface="Consolas" panose="020B0609020204030204" pitchFamily="49" charset="0"/>
             </a:endParaRPr>
           </a:p>
+          <a:p>
+            <a:r>
+              <a:rPr lang="en-US" sz="2000" dirty="0">
+                <a:solidFill>
+                  <a:srgbClr val="00DA63"/>
+                </a:solidFill>
+                <a:latin typeface="Consolas" panose="020B0609020204030204" pitchFamily="49" charset="0"/>
+              </a:rPr>
+              <a:t>Answer: O(n log</a:t>
+            </a:r>
+            <a:r>
+              <a:rPr lang="en-US" sz="2000" baseline="-25000" dirty="0">
+                <a:solidFill>
+                  <a:srgbClr val="00DA63"/>
+                </a:solidFill>
+                <a:latin typeface="Consolas" panose="020B0609020204030204" pitchFamily="49" charset="0"/>
+              </a:rPr>
+              <a:t>2</a:t>
+            </a:r>
+            <a:r>
+              <a:rPr lang="en-US" sz="2000" dirty="0">
+                <a:solidFill>
+                  <a:srgbClr val="00DA63"/>
+                </a:solidFill>
+                <a:latin typeface="Consolas" panose="020B0609020204030204" pitchFamily="49" charset="0"/>
+              </a:rPr>
+              <a:t> n)</a:t>
+            </a:r>
+          </a:p>
         </p:txBody>
       </p:sp>
     </p:spTree>
     <p:extLst>
       <p:ext uri="{BB962C8B-B14F-4D97-AF65-F5344CB8AC3E}">
-        <p14:creationId xmlns:p14="http://schemas.microsoft.com/office/powerpoint/2010/main" val="4086734313"/>
+        <p14:creationId xmlns:p14="http://schemas.microsoft.com/office/powerpoint/2010/main" val="2941247419"/>
       </p:ext>
     </p:extLst>
   </p:cSld>
@@ -11533,7 +11696,7 @@
         <p:spPr>
           <a:xfrm>
             <a:off x="1039618" y="1828743"/>
-            <a:ext cx="9635971" cy="3477875"/>
+            <a:ext cx="9635971" cy="3170099"/>
           </a:xfrm>
           <a:prstGeom prst="rect">
             <a:avLst/>
@@ -11643,59 +11806,12 @@
               <a:latin typeface="Consolas" panose="020B0609020204030204" pitchFamily="49" charset="0"/>
             </a:endParaRPr>
           </a:p>
-          <a:p>
-            <a:r>
-              <a:rPr lang="en-US" sz="2000" dirty="0">
-                <a:solidFill>
-                  <a:srgbClr val="00DA63"/>
-                </a:solidFill>
-                <a:latin typeface="Consolas" panose="020B0609020204030204" pitchFamily="49" charset="0"/>
-              </a:rPr>
-              <a:t>Answer: O (</a:t>
-            </a:r>
-            <a:r>
-              <a:rPr lang="en-US" sz="2000" dirty="0" err="1">
-                <a:solidFill>
-                  <a:srgbClr val="00DA63"/>
-                </a:solidFill>
-                <a:latin typeface="Consolas" panose="020B0609020204030204" pitchFamily="49" charset="0"/>
-              </a:rPr>
-              <a:t>log</a:t>
-            </a:r>
-            <a:r>
-              <a:rPr lang="en-US" sz="2000" baseline="-25000" dirty="0" err="1">
-                <a:solidFill>
-                  <a:srgbClr val="00DA63"/>
-                </a:solidFill>
-                <a:latin typeface="Consolas" panose="020B0609020204030204" pitchFamily="49" charset="0"/>
-              </a:rPr>
-              <a:t>m</a:t>
-            </a:r>
-            <a:r>
-              <a:rPr lang="en-US" sz="2000" baseline="-25000" dirty="0">
-                <a:solidFill>
-                  <a:srgbClr val="00DA63"/>
-                </a:solidFill>
-                <a:latin typeface="Consolas" panose="020B0609020204030204" pitchFamily="49" charset="0"/>
-              </a:rPr>
-              <a:t> </a:t>
-            </a:r>
-            <a:r>
-              <a:rPr lang="en-US" sz="2000" dirty="0">
-                <a:solidFill>
-                  <a:srgbClr val="00DA63"/>
-                </a:solidFill>
-                <a:latin typeface="Consolas" panose="020B0609020204030204" pitchFamily="49" charset="0"/>
-              </a:rPr>
-              <a:t>n)</a:t>
-            </a:r>
-          </a:p>
         </p:txBody>
       </p:sp>
     </p:spTree>
     <p:extLst>
       <p:ext uri="{BB962C8B-B14F-4D97-AF65-F5344CB8AC3E}">
-        <p14:creationId xmlns:p14="http://schemas.microsoft.com/office/powerpoint/2010/main" val="329785858"/>
+        <p14:creationId xmlns:p14="http://schemas.microsoft.com/office/powerpoint/2010/main" val="4086734313"/>
       </p:ext>
     </p:extLst>
   </p:cSld>
@@ -11780,7 +11896,7 @@
         <p:spPr>
           <a:xfrm>
             <a:off x="1039618" y="1828743"/>
-            <a:ext cx="9635971" cy="2862322"/>
+            <a:ext cx="9635971" cy="3477875"/>
           </a:xfrm>
           <a:prstGeom prst="rect">
             <a:avLst/>
@@ -11819,7 +11935,7 @@
                 </a:solidFill>
                 <a:latin typeface="Consolas" panose="020B0609020204030204" pitchFamily="49" charset="0"/>
               </a:rPr>
-              <a:t>result = 0</a:t>
+              <a:t>int i = 1;</a:t>
             </a:r>
           </a:p>
           <a:p>
@@ -11830,7 +11946,7 @@
                 </a:solidFill>
                 <a:latin typeface="Consolas" panose="020B0609020204030204" pitchFamily="49" charset="0"/>
               </a:rPr>
-              <a:t>for (int i = 0; i &lt; n; i++)</a:t>
+              <a:t>while (i &lt; n)</a:t>
             </a:r>
           </a:p>
           <a:p>
@@ -11841,7 +11957,7 @@
                 </a:solidFill>
                 <a:latin typeface="Consolas" panose="020B0609020204030204" pitchFamily="49" charset="0"/>
               </a:rPr>
-              <a:t>  result += i;</a:t>
+              <a:t>{</a:t>
             </a:r>
           </a:p>
           <a:p>
@@ -11852,7 +11968,7 @@
                 </a:solidFill>
                 <a:latin typeface="Consolas" panose="020B0609020204030204" pitchFamily="49" charset="0"/>
               </a:rPr>
-              <a:t>for (int j = 1; j &lt; m; j *= 2)</a:t>
+              <a:t>   i = i * m;</a:t>
             </a:r>
           </a:p>
           <a:p>
@@ -11863,7 +11979,7 @@
                 </a:solidFill>
                 <a:latin typeface="Consolas" panose="020B0609020204030204" pitchFamily="49" charset="0"/>
               </a:rPr>
-              <a:t>  result *= j;</a:t>
+              <a:t>}</a:t>
             </a:r>
           </a:p>
           <a:p>
@@ -11882,12 +11998,67 @@
               <a:latin typeface="Consolas" panose="020B0609020204030204" pitchFamily="49" charset="0"/>
             </a:endParaRPr>
           </a:p>
+          <a:p>
+            <a:endParaRPr lang="en-US" sz="2000" dirty="0">
+              <a:solidFill>
+                <a:srgbClr val="EB6E19"/>
+              </a:solidFill>
+              <a:latin typeface="Consolas" panose="020B0609020204030204" pitchFamily="49" charset="0"/>
+            </a:endParaRPr>
+          </a:p>
+          <a:p>
+            <a:r>
+              <a:rPr lang="en-US" sz="2000" dirty="0">
+                <a:solidFill>
+                  <a:srgbClr val="00DA63"/>
+                </a:solidFill>
+                <a:latin typeface="Consolas" panose="020B0609020204030204" pitchFamily="49" charset="0"/>
+              </a:rPr>
+              <a:t>Answer: O (</a:t>
+            </a:r>
+            <a:r>
+              <a:rPr lang="en-US" sz="2000" dirty="0" err="1">
+                <a:solidFill>
+                  <a:srgbClr val="00DA63"/>
+                </a:solidFill>
+                <a:latin typeface="Consolas" panose="020B0609020204030204" pitchFamily="49" charset="0"/>
+              </a:rPr>
+              <a:t>log</a:t>
+            </a:r>
+            <a:r>
+              <a:rPr lang="en-US" sz="2000" baseline="-25000" dirty="0" err="1">
+                <a:solidFill>
+                  <a:srgbClr val="00DA63"/>
+                </a:solidFill>
+                <a:latin typeface="Consolas" panose="020B0609020204030204" pitchFamily="49" charset="0"/>
+              </a:rPr>
+              <a:t>m</a:t>
+            </a:r>
+            <a:r>
+              <a:rPr lang="en-US" sz="2000" baseline="-25000" dirty="0">
+                <a:solidFill>
+                  <a:srgbClr val="00DA63"/>
+                </a:solidFill>
+                <a:latin typeface="Consolas" panose="020B0609020204030204" pitchFamily="49" charset="0"/>
+              </a:rPr>
+              <a:t> </a:t>
+            </a:r>
+            <a:r>
+              <a:rPr lang="en-US" sz="2000" dirty="0">
+                <a:solidFill>
+                  <a:srgbClr val="00DA63"/>
+                </a:solidFill>
+                <a:latin typeface="Consolas" panose="020B0609020204030204" pitchFamily="49" charset="0"/>
+              </a:rPr>
+              <a:t>n)</a:t>
+            </a:r>
+          </a:p>
         </p:txBody>
       </p:sp>
     </p:spTree>
     <p:extLst>
       <p:ext uri="{BB962C8B-B14F-4D97-AF65-F5344CB8AC3E}">
-        <p14:creationId xmlns:p14="http://schemas.microsoft.com/office/powerpoint/2010/main" val="1688701363"/>
+        <p14:creationId xmlns:p14="http://schemas.microsoft.com/office/powerpoint/2010/main" val="329785858"/>
       </p:ext>
     </p:extLst>
   </p:cSld>
@@ -11972,7 +12143,7 @@
         <p:spPr>
           <a:xfrm>
             <a:off x="1039618" y="1828743"/>
-            <a:ext cx="9635971" cy="3170099"/>
+            <a:ext cx="9635971" cy="2862322"/>
           </a:xfrm>
           <a:prstGeom prst="rect">
             <a:avLst/>
@@ -12074,41 +12245,12 @@
               <a:latin typeface="Consolas" panose="020B0609020204030204" pitchFamily="49" charset="0"/>
             </a:endParaRPr>
           </a:p>
-          <a:p>
-            <a:r>
-              <a:rPr lang="en-US" sz="2000" dirty="0">
-                <a:solidFill>
-                  <a:srgbClr val="00DA63"/>
-                </a:solidFill>
-                <a:latin typeface="Consolas" panose="020B0609020204030204" pitchFamily="49" charset="0"/>
-              </a:rPr>
-              <a:t>Answer: O(n+log</a:t>
-            </a:r>
-            <a:r>
-              <a:rPr lang="en-US" sz="2000" baseline="-25000" dirty="0">
-                <a:solidFill>
-                  <a:srgbClr val="00DA63"/>
-                </a:solidFill>
-                <a:latin typeface="Consolas" panose="020B0609020204030204" pitchFamily="49" charset="0"/>
-              </a:rPr>
-              <a:t>2 </a:t>
-            </a:r>
-            <a:r>
-              <a:rPr lang="en-US" sz="2000" dirty="0">
-                <a:solidFill>
-                  <a:srgbClr val="00DA63"/>
-                </a:solidFill>
-                <a:latin typeface="Consolas" panose="020B0609020204030204" pitchFamily="49" charset="0"/>
-              </a:rPr>
-              <a:t>m)</a:t>
-            </a:r>
-          </a:p>
         </p:txBody>
       </p:sp>
     </p:spTree>
     <p:extLst>
       <p:ext uri="{BB962C8B-B14F-4D97-AF65-F5344CB8AC3E}">
-        <p14:creationId xmlns:p14="http://schemas.microsoft.com/office/powerpoint/2010/main" val="2504223234"/>
+        <p14:creationId xmlns:p14="http://schemas.microsoft.com/office/powerpoint/2010/main" val="1688701363"/>
       </p:ext>
     </p:extLst>
   </p:cSld>
@@ -12193,7 +12335,7 @@
         <p:spPr>
           <a:xfrm>
             <a:off x="1039618" y="1828743"/>
-            <a:ext cx="9635971" cy="2246769"/>
+            <a:ext cx="9635971" cy="3170099"/>
           </a:xfrm>
           <a:prstGeom prst="rect">
             <a:avLst/>
@@ -12232,7 +12374,7 @@
                 </a:solidFill>
                 <a:latin typeface="Consolas" panose="020B0609020204030204" pitchFamily="49" charset="0"/>
               </a:rPr>
-              <a:t>for (int i=n; i&gt;0; i/=2)</a:t>
+              <a:t>result = 0</a:t>
             </a:r>
           </a:p>
           <a:p>
@@ -12243,17 +12385,21 @@
                 </a:solidFill>
                 <a:latin typeface="Consolas" panose="020B0609020204030204" pitchFamily="49" charset="0"/>
               </a:rPr>
-              <a:t>	for (int j=1; j&lt;i; </a:t>
-            </a:r>
-            <a:r>
-              <a:rPr lang="en-US" sz="2000" dirty="0" err="1">
+              <a:t>for (int i = 0; i &lt; n; i++)</a:t>
+            </a:r>
+          </a:p>
+          <a:p>
+            <a:r>
+              <a:rPr lang="en-US" sz="2000" dirty="0">
                 <a:solidFill>
                   <a:srgbClr val="EB6E19"/>
                 </a:solidFill>
                 <a:latin typeface="Consolas" panose="020B0609020204030204" pitchFamily="49" charset="0"/>
               </a:rPr>
-              <a:t>j++</a:t>
-            </a:r>
+              <a:t>  result += i;</a:t>
+            </a:r>
+          </a:p>
+          <a:p>
             <a:r>
               <a:rPr lang="en-US" sz="2000" dirty="0">
                 <a:solidFill>
@@ -12261,7 +12407,7 @@
                 </a:solidFill>
                 <a:latin typeface="Consolas" panose="020B0609020204030204" pitchFamily="49" charset="0"/>
               </a:rPr>
-              <a:t>)</a:t>
+              <a:t>for (int j = 1; j &lt; m; j *= 2)</a:t>
             </a:r>
           </a:p>
           <a:p>
@@ -12272,7 +12418,7 @@
                 </a:solidFill>
                 <a:latin typeface="Consolas" panose="020B0609020204030204" pitchFamily="49" charset="0"/>
               </a:rPr>
-              <a:t>		sum = sum + 1;</a:t>
+              <a:t>  result *= j;</a:t>
             </a:r>
           </a:p>
           <a:p>
@@ -12291,12 +12437,41 @@
               <a:latin typeface="Consolas" panose="020B0609020204030204" pitchFamily="49" charset="0"/>
             </a:endParaRPr>
           </a:p>
+          <a:p>
+            <a:r>
+              <a:rPr lang="en-US" sz="2000" dirty="0">
+                <a:solidFill>
+                  <a:srgbClr val="00DA63"/>
+                </a:solidFill>
+                <a:latin typeface="Consolas" panose="020B0609020204030204" pitchFamily="49" charset="0"/>
+              </a:rPr>
+              <a:t>Answer: O(n+log</a:t>
+            </a:r>
+            <a:r>
+              <a:rPr lang="en-US" sz="2000" baseline="-25000" dirty="0">
+                <a:solidFill>
+                  <a:srgbClr val="00DA63"/>
+                </a:solidFill>
+                <a:latin typeface="Consolas" panose="020B0609020204030204" pitchFamily="49" charset="0"/>
+              </a:rPr>
+              <a:t>2 </a:t>
+            </a:r>
+            <a:r>
+              <a:rPr lang="en-US" sz="2000" dirty="0">
+                <a:solidFill>
+                  <a:srgbClr val="00DA63"/>
+                </a:solidFill>
+                <a:latin typeface="Consolas" panose="020B0609020204030204" pitchFamily="49" charset="0"/>
+              </a:rPr>
+              <a:t>m)</a:t>
+            </a:r>
+          </a:p>
         </p:txBody>
       </p:sp>
     </p:spTree>
     <p:extLst>
       <p:ext uri="{BB962C8B-B14F-4D97-AF65-F5344CB8AC3E}">
-        <p14:creationId xmlns:p14="http://schemas.microsoft.com/office/powerpoint/2010/main" val="1877007125"/>
+        <p14:creationId xmlns:p14="http://schemas.microsoft.com/office/powerpoint/2010/main" val="2504223234"/>
       </p:ext>
     </p:extLst>
   </p:cSld>
@@ -12381,7 +12556,7 @@
         <p:spPr>
           <a:xfrm>
             <a:off x="1039618" y="1828743"/>
-            <a:ext cx="9635971" cy="2554545"/>
+            <a:ext cx="9635971" cy="2246769"/>
           </a:xfrm>
           <a:prstGeom prst="rect">
             <a:avLst/>
@@ -12479,23 +12654,12 @@
               <a:latin typeface="Consolas" panose="020B0609020204030204" pitchFamily="49" charset="0"/>
             </a:endParaRPr>
           </a:p>
-          <a:p>
-            <a:r>
-              <a:rPr lang="en-US" sz="2000" dirty="0">
-                <a:solidFill>
-                  <a:srgbClr val="00DA63"/>
-                </a:solidFill>
-                <a:latin typeface="Consolas" panose="020B0609020204030204" pitchFamily="49" charset="0"/>
-              </a:rPr>
-              <a:t>Answer: O(n)</a:t>
-            </a:r>
-          </a:p>
         </p:txBody>
       </p:sp>
     </p:spTree>
     <p:extLst>
       <p:ext uri="{BB962C8B-B14F-4D97-AF65-F5344CB8AC3E}">
-        <p14:creationId xmlns:p14="http://schemas.microsoft.com/office/powerpoint/2010/main" val="2916700440"/>
+        <p14:creationId xmlns:p14="http://schemas.microsoft.com/office/powerpoint/2010/main" val="1877007125"/>
       </p:ext>
     </p:extLst>
   </p:cSld>
@@ -12580,7 +12744,7 @@
         <p:spPr>
           <a:xfrm>
             <a:off x="1039618" y="1828743"/>
-            <a:ext cx="9212778" cy="2554545"/>
+            <a:ext cx="9635971" cy="2554545"/>
           </a:xfrm>
           <a:prstGeom prst="rect">
             <a:avLst/>
@@ -12600,7 +12764,7 @@
                 </a:solidFill>
                 <a:latin typeface="Consolas" panose="020B0609020204030204" pitchFamily="49" charset="0"/>
               </a:rPr>
-              <a:t>Which code snippet will take less time to execute on a computer?</a:t>
+              <a:t>What is the computational complexity of the following code snippet?</a:t>
             </a:r>
           </a:p>
           <a:p>
@@ -12619,38 +12783,18 @@
                 </a:solidFill>
                 <a:latin typeface="Consolas" panose="020B0609020204030204" pitchFamily="49" charset="0"/>
               </a:rPr>
-              <a:t>            </a:t>
-            </a:r>
+              <a:t>for (int i=n; i&gt;0; i/=2)</a:t>
+            </a:r>
+          </a:p>
+          <a:p>
             <a:r>
               <a:rPr lang="en-US" sz="2000" dirty="0">
                 <a:solidFill>
-                  <a:srgbClr val="00DA63"/>
-                </a:solidFill>
-                <a:latin typeface="Consolas" panose="020B0609020204030204" pitchFamily="49" charset="0"/>
-              </a:rPr>
-              <a:t> A                                    B</a:t>
-            </a:r>
-          </a:p>
-          <a:p>
-            <a:r>
-              <a:rPr lang="en-US" sz="2000" dirty="0">
-                <a:solidFill>
                   <a:srgbClr val="EB6E19"/>
                 </a:solidFill>
                 <a:latin typeface="Consolas" panose="020B0609020204030204" pitchFamily="49" charset="0"/>
               </a:rPr>
-              <a:t>for (int i=1; i &lt; n; i++)</a:t>
-            </a:r>
-          </a:p>
-          <a:p>
-            <a:r>
-              <a:rPr lang="en-US" sz="2000" dirty="0">
-                <a:solidFill>
-                  <a:srgbClr val="EB6E19"/>
-                </a:solidFill>
-                <a:latin typeface="Consolas" panose="020B0609020204030204" pitchFamily="49" charset="0"/>
-              </a:rPr>
-              <a:t>	for (int j=1; j &lt; n; </a:t>
+              <a:t>	for (int j=1; j&lt;i; </a:t>
             </a:r>
             <a:r>
               <a:rPr lang="en-US" sz="2000" dirty="0" err="1">
@@ -12698,84 +12842,15 @@
               <a:latin typeface="Consolas" panose="020B0609020204030204" pitchFamily="49" charset="0"/>
             </a:endParaRPr>
           </a:p>
-        </p:txBody>
-      </p:sp>
-      <p:sp>
-        <p:nvSpPr>
-          <p:cNvPr id="7" name="TextBox 6">
-            <a:extLst>
-              <a:ext uri="{FF2B5EF4-FFF2-40B4-BE49-F238E27FC236}">
-                <a16:creationId xmlns:a16="http://schemas.microsoft.com/office/drawing/2014/main" id="{92A4DF68-D3B8-4D4F-85C6-D314CAD1A865}"/>
-              </a:ext>
-            </a:extLst>
-          </p:cNvPr>
-          <p:cNvSpPr txBox="1"/>
-          <p:nvPr/>
-        </p:nvSpPr>
-        <p:spPr>
-          <a:xfrm>
-            <a:off x="6353071" y="2798239"/>
-            <a:ext cx="6094324" cy="923330"/>
-          </a:xfrm>
-          <a:prstGeom prst="rect">
-            <a:avLst/>
-          </a:prstGeom>
-          <a:noFill/>
-        </p:spPr>
-        <p:txBody>
-          <a:bodyPr wrap="square">
-            <a:spAutoFit/>
-          </a:bodyPr>
-          <a:lstStyle/>
-          <a:p>
-            <a:r>
-              <a:rPr lang="en-US" sz="1800" dirty="0">
-                <a:solidFill>
-                  <a:srgbClr val="EB6E19"/>
-                </a:solidFill>
-                <a:latin typeface="Consolas" panose="020B0609020204030204" pitchFamily="49" charset="0"/>
-              </a:rPr>
-              <a:t>for (int i=1; i &lt; 2n; i++)</a:t>
-            </a:r>
-          </a:p>
-          <a:p>
-            <a:r>
-              <a:rPr lang="en-US" sz="1800" dirty="0">
-                <a:solidFill>
-                  <a:srgbClr val="EB6E19"/>
-                </a:solidFill>
-                <a:latin typeface="Consolas" panose="020B0609020204030204" pitchFamily="49" charset="0"/>
-              </a:rPr>
-              <a:t>	for (int j=1; j &lt; 2n; </a:t>
-            </a:r>
-            <a:r>
-              <a:rPr lang="en-US" sz="1800" dirty="0" err="1">
-                <a:solidFill>
-                  <a:srgbClr val="EB6E19"/>
-                </a:solidFill>
-                <a:latin typeface="Consolas" panose="020B0609020204030204" pitchFamily="49" charset="0"/>
-              </a:rPr>
-              <a:t>j++</a:t>
-            </a:r>
-            <a:r>
-              <a:rPr lang="en-US" sz="1800" dirty="0">
-                <a:solidFill>
-                  <a:srgbClr val="EB6E19"/>
-                </a:solidFill>
-                <a:latin typeface="Consolas" panose="020B0609020204030204" pitchFamily="49" charset="0"/>
-              </a:rPr>
-              <a:t>)</a:t>
-            </a:r>
-          </a:p>
-          <a:p>
-            <a:r>
-              <a:rPr lang="en-US" sz="1800" dirty="0">
-                <a:solidFill>
-                  <a:srgbClr val="EB6E19"/>
-                </a:solidFill>
-                <a:latin typeface="Consolas" panose="020B0609020204030204" pitchFamily="49" charset="0"/>
-              </a:rPr>
-              <a:t>		sum = sum + 1;</a:t>
+          <a:p>
+            <a:r>
+              <a:rPr lang="en-US" sz="2000" dirty="0">
+                <a:solidFill>
+                  <a:srgbClr val="00DA63"/>
+                </a:solidFill>
+                <a:latin typeface="Consolas" panose="020B0609020204030204" pitchFamily="49" charset="0"/>
+              </a:rPr>
+              <a:t>Answer: O(n)</a:t>
             </a:r>
           </a:p>
         </p:txBody>
@@ -12783,7 +12858,7 @@
     </p:spTree>
     <p:extLst>
       <p:ext uri="{BB962C8B-B14F-4D97-AF65-F5344CB8AC3E}">
-        <p14:creationId xmlns:p14="http://schemas.microsoft.com/office/powerpoint/2010/main" val="188823183"/>
+        <p14:creationId xmlns:p14="http://schemas.microsoft.com/office/powerpoint/2010/main" val="2916700440"/>
       </p:ext>
     </p:extLst>
   </p:cSld>
@@ -12868,7 +12943,7 @@
         <p:spPr>
           <a:xfrm>
             <a:off x="1039618" y="1828743"/>
-            <a:ext cx="9212778" cy="2862322"/>
+            <a:ext cx="9212778" cy="2554545"/>
           </a:xfrm>
           <a:prstGeom prst="rect">
             <a:avLst/>
@@ -12985,17 +13060,6 @@
               </a:solidFill>
               <a:latin typeface="Consolas" panose="020B0609020204030204" pitchFamily="49" charset="0"/>
             </a:endParaRPr>
-          </a:p>
-          <a:p>
-            <a:r>
-              <a:rPr lang="en-US" sz="2000" dirty="0">
-                <a:solidFill>
-                  <a:srgbClr val="00DA63"/>
-                </a:solidFill>
-                <a:latin typeface="Consolas" panose="020B0609020204030204" pitchFamily="49" charset="0"/>
-              </a:rPr>
-              <a:t>Answer: A</a:t>
-            </a:r>
           </a:p>
         </p:txBody>
       </p:sp>
@@ -13082,7 +13146,7 @@
     </p:spTree>
     <p:extLst>
       <p:ext uri="{BB962C8B-B14F-4D97-AF65-F5344CB8AC3E}">
-        <p14:creationId xmlns:p14="http://schemas.microsoft.com/office/powerpoint/2010/main" val="1287381242"/>
+        <p14:creationId xmlns:p14="http://schemas.microsoft.com/office/powerpoint/2010/main" val="188823183"/>
       </p:ext>
     </p:extLst>
   </p:cSld>
@@ -13166,8 +13230,8 @@
         </p:nvSpPr>
         <p:spPr>
           <a:xfrm>
-            <a:off x="1039619" y="1828743"/>
-            <a:ext cx="10515600" cy="2862322"/>
+            <a:off x="1039618" y="1828743"/>
+            <a:ext cx="9212778" cy="2862322"/>
           </a:xfrm>
           <a:prstGeom prst="rect">
             <a:avLst/>
@@ -13175,7 +13239,7 @@
           <a:noFill/>
         </p:spPr>
         <p:txBody>
-          <a:bodyPr wrap="square" rtlCol="0">
+          <a:bodyPr wrap="none" rtlCol="0">
             <a:spAutoFit/>
           </a:bodyPr>
           <a:lstStyle/>
@@ -13187,25 +13251,7 @@
                 </a:solidFill>
                 <a:latin typeface="Consolas" panose="020B0609020204030204" pitchFamily="49" charset="0"/>
               </a:rPr>
-              <a:t>Which code snippet will have a higher growth rate </a:t>
-            </a:r>
-            <a:r>
-              <a:rPr lang="en-US" sz="2000" dirty="0" err="1">
-                <a:solidFill>
-                  <a:srgbClr val="0081E2"/>
-                </a:solidFill>
-                <a:latin typeface="Consolas" panose="020B0609020204030204" pitchFamily="49" charset="0"/>
-              </a:rPr>
-              <a:t>asymtotically</a:t>
-            </a:r>
-            <a:r>
-              <a:rPr lang="en-US" sz="2000" dirty="0">
-                <a:solidFill>
-                  <a:srgbClr val="0081E2"/>
-                </a:solidFill>
-                <a:latin typeface="Consolas" panose="020B0609020204030204" pitchFamily="49" charset="0"/>
-              </a:rPr>
-              <a:t> in terms of Big O notation?</a:t>
+              <a:t>Which code snippet will take less time to execute on a computer?</a:t>
             </a:r>
           </a:p>
           <a:p>
@@ -13302,6 +13348,17 @@
               </a:solidFill>
               <a:latin typeface="Consolas" panose="020B0609020204030204" pitchFamily="49" charset="0"/>
             </a:endParaRPr>
+          </a:p>
+          <a:p>
+            <a:r>
+              <a:rPr lang="en-US" sz="2000" dirty="0">
+                <a:solidFill>
+                  <a:srgbClr val="00DA63"/>
+                </a:solidFill>
+                <a:latin typeface="Consolas" panose="020B0609020204030204" pitchFamily="49" charset="0"/>
+              </a:rPr>
+              <a:t>Answer: A</a:t>
+            </a:r>
           </a:p>
         </p:txBody>
       </p:sp>
@@ -13319,7 +13376,7 @@
         </p:nvSpPr>
         <p:spPr>
           <a:xfrm>
-            <a:off x="6297419" y="3059496"/>
+            <a:off x="6353071" y="2798239"/>
             <a:ext cx="6094324" cy="923330"/>
           </a:xfrm>
           <a:prstGeom prst="rect">
@@ -13388,7 +13445,7 @@
     </p:spTree>
     <p:extLst>
       <p:ext uri="{BB962C8B-B14F-4D97-AF65-F5344CB8AC3E}">
-        <p14:creationId xmlns:p14="http://schemas.microsoft.com/office/powerpoint/2010/main" val="1211821534"/>
+        <p14:creationId xmlns:p14="http://schemas.microsoft.com/office/powerpoint/2010/main" val="1287381242"/>
       </p:ext>
     </p:extLst>
   </p:cSld>
@@ -13473,7 +13530,7 @@
         <p:spPr>
           <a:xfrm>
             <a:off x="1039619" y="1828743"/>
-            <a:ext cx="10515600" cy="3170099"/>
+            <a:ext cx="10515600" cy="2862322"/>
           </a:xfrm>
           <a:prstGeom prst="rect">
             <a:avLst/>
@@ -13493,7 +13550,25 @@
                 </a:solidFill>
                 <a:latin typeface="Consolas" panose="020B0609020204030204" pitchFamily="49" charset="0"/>
               </a:rPr>
-              <a:t>Which code snippet will have a higher growth rate asymptotically in terms of Big O notation?</a:t>
+              <a:t>Which code snippet will have a higher growth rate </a:t>
+            </a:r>
+            <a:r>
+              <a:rPr lang="en-US" sz="2000" dirty="0" err="1">
+                <a:solidFill>
+                  <a:srgbClr val="0081E2"/>
+                </a:solidFill>
+                <a:latin typeface="Consolas" panose="020B0609020204030204" pitchFamily="49" charset="0"/>
+              </a:rPr>
+              <a:t>asymtotically</a:t>
+            </a:r>
+            <a:r>
+              <a:rPr lang="en-US" sz="2000" dirty="0">
+                <a:solidFill>
+                  <a:srgbClr val="0081E2"/>
+                </a:solidFill>
+                <a:latin typeface="Consolas" panose="020B0609020204030204" pitchFamily="49" charset="0"/>
+              </a:rPr>
+              <a:t> in terms of Big O notation?</a:t>
             </a:r>
           </a:p>
           <a:p>
@@ -13587,32 +13662,6 @@
             <a:endParaRPr lang="en-US" sz="2000" dirty="0">
               <a:solidFill>
                 <a:srgbClr val="EB6E19"/>
-              </a:solidFill>
-              <a:latin typeface="Consolas" panose="020B0609020204030204" pitchFamily="49" charset="0"/>
-            </a:endParaRPr>
-          </a:p>
-          <a:p>
-            <a:r>
-              <a:rPr lang="en-US" sz="2000" dirty="0">
-                <a:solidFill>
-                  <a:srgbClr val="00DA63"/>
-                </a:solidFill>
-                <a:latin typeface="Consolas" panose="020B0609020204030204" pitchFamily="49" charset="0"/>
-              </a:rPr>
-              <a:t>Answer: A and B grow at the same rate </a:t>
-            </a:r>
-            <a:r>
-              <a:rPr lang="en-US" sz="2000" dirty="0" err="1">
-                <a:solidFill>
-                  <a:srgbClr val="00DA63"/>
-                </a:solidFill>
-                <a:latin typeface="Consolas" panose="020B0609020204030204" pitchFamily="49" charset="0"/>
-              </a:rPr>
-              <a:t>asymtotically</a:t>
-            </a:r>
-            <a:endParaRPr lang="en-US" sz="2000" dirty="0">
-              <a:solidFill>
-                <a:srgbClr val="00DA63"/>
               </a:solidFill>
               <a:latin typeface="Consolas" panose="020B0609020204030204" pitchFamily="49" charset="0"/>
             </a:endParaRPr>
@@ -13702,7 +13751,7 @@
     </p:spTree>
     <p:extLst>
       <p:ext uri="{BB962C8B-B14F-4D97-AF65-F5344CB8AC3E}">
-        <p14:creationId xmlns:p14="http://schemas.microsoft.com/office/powerpoint/2010/main" val="2651317974"/>
+        <p14:creationId xmlns:p14="http://schemas.microsoft.com/office/powerpoint/2010/main" val="1211821534"/>
       </p:ext>
     </p:extLst>
   </p:cSld>
@@ -14756,7 +14805,7 @@
             </a:ln>
             <a:extLst>
               <a:ext uri="{909E8E84-426E-40dd-AFC4-6F175D3DCCD1}">
-                <a14:hiddenFill xmlns:a14="http://schemas.microsoft.com/office/drawing/2010/main" xmlns="">
+                <a14:hiddenFill xmlns="" xmlns:a14="http://schemas.microsoft.com/office/drawing/2010/main">
                   <a:noFill/>
                 </a14:hiddenFill>
               </a:ext>
@@ -14798,7 +14847,7 @@
             </a:ln>
             <a:extLst>
               <a:ext uri="{909E8E84-426E-40dd-AFC4-6F175D3DCCD1}">
-                <a14:hiddenFill xmlns:a14="http://schemas.microsoft.com/office/drawing/2010/main" xmlns="">
+                <a14:hiddenFill xmlns="" xmlns:a14="http://schemas.microsoft.com/office/drawing/2010/main">
                   <a:noFill/>
                 </a14:hiddenFill>
               </a:ext>
@@ -15162,7 +15211,7 @@
             </a:ln>
             <a:extLst>
               <a:ext uri="{909E8E84-426E-40dd-AFC4-6F175D3DCCD1}">
-                <a14:hiddenFill xmlns:a14="http://schemas.microsoft.com/office/drawing/2010/main" xmlns="">
+                <a14:hiddenFill xmlns="" xmlns:a14="http://schemas.microsoft.com/office/drawing/2010/main">
                   <a:noFill/>
                 </a14:hiddenFill>
               </a:ext>
@@ -15207,7 +15256,7 @@
             </a:ln>
             <a:extLst>
               <a:ext uri="{909E8E84-426E-40dd-AFC4-6F175D3DCCD1}">
-                <a14:hiddenFill xmlns:a14="http://schemas.microsoft.com/office/drawing/2010/main" xmlns="">
+                <a14:hiddenFill xmlns="" xmlns:a14="http://schemas.microsoft.com/office/drawing/2010/main">
                   <a:noFill/>
                 </a14:hiddenFill>
               </a:ext>
@@ -15252,7 +15301,7 @@
             </a:ln>
             <a:extLst>
               <a:ext uri="{909E8E84-426E-40dd-AFC4-6F175D3DCCD1}">
-                <a14:hiddenFill xmlns:a14="http://schemas.microsoft.com/office/drawing/2010/main" xmlns="">
+                <a14:hiddenFill xmlns="" xmlns:a14="http://schemas.microsoft.com/office/drawing/2010/main">
                   <a:noFill/>
                 </a14:hiddenFill>
               </a:ext>
@@ -15296,7 +15345,7 @@
             </a:ln>
             <a:extLst>
               <a:ext uri="{909E8E84-426E-40dd-AFC4-6F175D3DCCD1}">
-                <a14:hiddenFill xmlns:a14="http://schemas.microsoft.com/office/drawing/2010/main" xmlns="">
+                <a14:hiddenFill xmlns="" xmlns:a14="http://schemas.microsoft.com/office/drawing/2010/main">
                   <a:noFill/>
                 </a14:hiddenFill>
               </a:ext>
@@ -15372,268 +15421,256 @@
                 </a:solidFill>
                 <a:latin typeface="Gotham Bold" pitchFamily="50" charset="0"/>
               </a:rPr>
-              <a:t>Mini Review – Linked Lists</a:t>
-            </a:r>
-          </a:p>
-        </p:txBody>
-      </p:sp>
-      <p:sp>
-        <p:nvSpPr>
-          <p:cNvPr id="5" name="Content Placeholder 1">
+              <a:t>Mini Review – Complexity</a:t>
+            </a:r>
+          </a:p>
+        </p:txBody>
+      </p:sp>
+      <p:sp>
+        <p:nvSpPr>
+          <p:cNvPr id="4" name="TextBox 3">
             <a:extLst>
               <a:ext uri="{FF2B5EF4-FFF2-40B4-BE49-F238E27FC236}">
-                <a16:creationId xmlns:a16="http://schemas.microsoft.com/office/drawing/2014/main" id="{9069B1C4-5084-4E0D-9FA0-9C8B794FA1FE}"/>
+                <a16:creationId xmlns:a16="http://schemas.microsoft.com/office/drawing/2014/main" id="{A70E6009-18FB-490F-970D-3C9B83737A5E}"/>
               </a:ext>
             </a:extLst>
           </p:cNvPr>
-          <p:cNvSpPr txBox="1">
-            <a:spLocks/>
-          </p:cNvSpPr>
+          <p:cNvSpPr txBox="1"/>
           <p:nvPr/>
         </p:nvSpPr>
         <p:spPr>
           <a:xfrm>
-            <a:off x="940881" y="1690688"/>
-            <a:ext cx="9790759" cy="5057971"/>
+            <a:off x="1039619" y="1828743"/>
+            <a:ext cx="10515600" cy="3170099"/>
           </a:xfrm>
           <a:prstGeom prst="rect">
             <a:avLst/>
           </a:prstGeom>
+          <a:noFill/>
         </p:spPr>
         <p:txBody>
-          <a:bodyPr vert="horz" lIns="91440" tIns="45720" rIns="91440" bIns="45720" rtlCol="0" anchor="t"/>
-          <a:lstStyle>
-            <a:defPPr>
-              <a:defRPr lang="en-US"/>
-            </a:defPPr>
-            <a:lvl1pPr marL="0" algn="l" defTabSz="914400" rtl="0" eaLnBrk="1" latinLnBrk="0" hangingPunct="1">
-              <a:defRPr sz="1200" kern="1200">
-                <a:solidFill>
-                  <a:schemeClr val="tx1">
-                    <a:tint val="75000"/>
-                  </a:schemeClr>
-                </a:solidFill>
-                <a:latin typeface="+mn-lt"/>
-                <a:ea typeface="+mn-ea"/>
-                <a:cs typeface="+mn-cs"/>
-              </a:defRPr>
-            </a:lvl1pPr>
-            <a:lvl2pPr marL="457200" algn="l" defTabSz="914400" rtl="0" eaLnBrk="1" latinLnBrk="0" hangingPunct="1">
-              <a:defRPr sz="1800" kern="1200">
-                <a:solidFill>
-                  <a:schemeClr val="tx1"/>
-                </a:solidFill>
-                <a:latin typeface="+mn-lt"/>
-                <a:ea typeface="+mn-ea"/>
-                <a:cs typeface="+mn-cs"/>
-              </a:defRPr>
-            </a:lvl2pPr>
-            <a:lvl3pPr marL="914400" algn="l" defTabSz="914400" rtl="0" eaLnBrk="1" latinLnBrk="0" hangingPunct="1">
-              <a:defRPr sz="1800" kern="1200">
-                <a:solidFill>
-                  <a:schemeClr val="tx1"/>
-                </a:solidFill>
-                <a:latin typeface="+mn-lt"/>
-                <a:ea typeface="+mn-ea"/>
-                <a:cs typeface="+mn-cs"/>
-              </a:defRPr>
-            </a:lvl3pPr>
-            <a:lvl4pPr marL="1371600" algn="l" defTabSz="914400" rtl="0" eaLnBrk="1" latinLnBrk="0" hangingPunct="1">
-              <a:defRPr sz="1800" kern="1200">
-                <a:solidFill>
-                  <a:schemeClr val="tx1"/>
-                </a:solidFill>
-                <a:latin typeface="+mn-lt"/>
-                <a:ea typeface="+mn-ea"/>
-                <a:cs typeface="+mn-cs"/>
-              </a:defRPr>
-            </a:lvl4pPr>
-            <a:lvl5pPr marL="1828800" algn="l" defTabSz="914400" rtl="0" eaLnBrk="1" latinLnBrk="0" hangingPunct="1">
-              <a:defRPr sz="1800" kern="1200">
-                <a:solidFill>
-                  <a:schemeClr val="tx1"/>
-                </a:solidFill>
-                <a:latin typeface="+mn-lt"/>
-                <a:ea typeface="+mn-ea"/>
-                <a:cs typeface="+mn-cs"/>
-              </a:defRPr>
-            </a:lvl5pPr>
-            <a:lvl6pPr marL="2286000" algn="l" defTabSz="914400" rtl="0" eaLnBrk="1" latinLnBrk="0" hangingPunct="1">
-              <a:defRPr sz="1800" kern="1200">
-                <a:solidFill>
-                  <a:schemeClr val="tx1"/>
-                </a:solidFill>
-                <a:latin typeface="+mn-lt"/>
-                <a:ea typeface="+mn-ea"/>
-                <a:cs typeface="+mn-cs"/>
-              </a:defRPr>
-            </a:lvl6pPr>
-            <a:lvl7pPr marL="2743200" algn="l" defTabSz="914400" rtl="0" eaLnBrk="1" latinLnBrk="0" hangingPunct="1">
-              <a:defRPr sz="1800" kern="1200">
-                <a:solidFill>
-                  <a:schemeClr val="tx1"/>
-                </a:solidFill>
-                <a:latin typeface="+mn-lt"/>
-                <a:ea typeface="+mn-ea"/>
-                <a:cs typeface="+mn-cs"/>
-              </a:defRPr>
-            </a:lvl7pPr>
-            <a:lvl8pPr marL="3200400" algn="l" defTabSz="914400" rtl="0" eaLnBrk="1" latinLnBrk="0" hangingPunct="1">
-              <a:defRPr sz="1800" kern="1200">
-                <a:solidFill>
-                  <a:schemeClr val="tx1"/>
-                </a:solidFill>
-                <a:latin typeface="+mn-lt"/>
-                <a:ea typeface="+mn-ea"/>
-                <a:cs typeface="+mn-cs"/>
-              </a:defRPr>
-            </a:lvl8pPr>
-            <a:lvl9pPr marL="3657600" algn="l" defTabSz="914400" rtl="0" eaLnBrk="1" latinLnBrk="0" hangingPunct="1">
-              <a:defRPr sz="1800" kern="1200">
-                <a:solidFill>
-                  <a:schemeClr val="tx1"/>
-                </a:solidFill>
-                <a:latin typeface="+mn-lt"/>
-                <a:ea typeface="+mn-ea"/>
-                <a:cs typeface="+mn-cs"/>
-              </a:defRPr>
-            </a:lvl9pPr>
-          </a:lstStyle>
-          <a:p>
-            <a:r>
-              <a:rPr lang="en-US" sz="1600" dirty="0">
+          <a:bodyPr wrap="square" rtlCol="0">
+            <a:spAutoFit/>
+          </a:bodyPr>
+          <a:lstStyle/>
+          <a:p>
+            <a:r>
+              <a:rPr lang="en-US" sz="2000" dirty="0">
                 <a:solidFill>
                   <a:srgbClr val="0081E2"/>
                 </a:solidFill>
                 <a:latin typeface="Consolas" panose="020B0609020204030204" pitchFamily="49" charset="0"/>
               </a:rPr>
-              <a:t>Consider a class List that implements an </a:t>
-            </a:r>
-            <a:r>
-              <a:rPr lang="en-US" sz="1600" dirty="0">
-                <a:solidFill>
-                  <a:srgbClr val="EB6E19"/>
-                </a:solidFill>
-                <a:latin typeface="Consolas" panose="020B0609020204030204" pitchFamily="49" charset="0"/>
-              </a:rPr>
-              <a:t>ordered</a:t>
-            </a:r>
-            <a:r>
-              <a:rPr lang="en-US" sz="1600" dirty="0">
-                <a:solidFill>
-                  <a:srgbClr val="0081E2"/>
-                </a:solidFill>
-                <a:latin typeface="Consolas" panose="020B0609020204030204" pitchFamily="49" charset="0"/>
-              </a:rPr>
-              <a:t> list backed by a singly linked list with a head pointer. The invariant “</a:t>
-            </a:r>
-            <a:r>
-              <a:rPr lang="en-US" sz="1600" dirty="0">
-                <a:solidFill>
-                  <a:srgbClr val="EB6E19"/>
-                </a:solidFill>
-                <a:latin typeface="Consolas" panose="020B0609020204030204" pitchFamily="49" charset="0"/>
-              </a:rPr>
-              <a:t>ordered</a:t>
-            </a:r>
-            <a:r>
-              <a:rPr lang="en-US" sz="1600" dirty="0">
-                <a:solidFill>
-                  <a:srgbClr val="0081E2"/>
-                </a:solidFill>
-                <a:latin typeface="Consolas" panose="020B0609020204030204" pitchFamily="49" charset="0"/>
-              </a:rPr>
-              <a:t>” is maintained always. Given that representation, what is the worst-case time complexity of the following operations? Assume the list is sorted in ascending order.</a:t>
-            </a:r>
-          </a:p>
-          <a:p>
-            <a:endParaRPr lang="en-US" sz="1600" dirty="0">
+              <a:t>Which code snippet will have a higher growth rate asymptotically in terms of Big O notation?</a:t>
+            </a:r>
+          </a:p>
+          <a:p>
+            <a:endParaRPr lang="en-US" sz="2000" dirty="0">
               <a:solidFill>
-                <a:srgbClr val="0081E2"/>
+                <a:srgbClr val="EB6E19"/>
               </a:solidFill>
               <a:latin typeface="Consolas" panose="020B0609020204030204" pitchFamily="49" charset="0"/>
             </a:endParaRPr>
           </a:p>
           <a:p>
             <a:r>
-              <a:rPr lang="en-US" sz="1600" dirty="0">
-                <a:solidFill>
-                  <a:srgbClr val="0081E2"/>
-                </a:solidFill>
-                <a:latin typeface="Consolas" panose="020B0609020204030204" pitchFamily="49" charset="0"/>
-              </a:rPr>
-              <a:t>A. Insert an item</a:t>
-            </a:r>
-          </a:p>
-          <a:p>
-            <a:r>
-              <a:rPr lang="en-US" sz="1600" dirty="0">
-                <a:solidFill>
-                  <a:srgbClr val="0081E2"/>
-                </a:solidFill>
-                <a:latin typeface="Consolas" panose="020B0609020204030204" pitchFamily="49" charset="0"/>
-              </a:rPr>
-              <a:t>B. Finding the minimum element</a:t>
-            </a:r>
-          </a:p>
-          <a:p>
-            <a:r>
-              <a:rPr lang="en-US" sz="1600" dirty="0">
-                <a:solidFill>
-                  <a:srgbClr val="0081E2"/>
-                </a:solidFill>
-                <a:latin typeface="Consolas" panose="020B0609020204030204" pitchFamily="49" charset="0"/>
-              </a:rPr>
-              <a:t>C. Delete the largest element from list</a:t>
-            </a:r>
-          </a:p>
-          <a:p>
-            <a:r>
-              <a:rPr lang="en-US" sz="1600" dirty="0">
-                <a:solidFill>
-                  <a:srgbClr val="0081E2"/>
-                </a:solidFill>
-                <a:latin typeface="Consolas" panose="020B0609020204030204" pitchFamily="49" charset="0"/>
-              </a:rPr>
-              <a:t>D. Finding the largest element</a:t>
-            </a:r>
-          </a:p>
-          <a:p>
-            <a:r>
-              <a:rPr lang="en-US" sz="1600" dirty="0">
-                <a:solidFill>
-                  <a:srgbClr val="0081E2"/>
-                </a:solidFill>
-                <a:latin typeface="Consolas" panose="020B0609020204030204" pitchFamily="49" charset="0"/>
-              </a:rPr>
-              <a:t>E. Finding a random element, n</a:t>
-            </a:r>
-          </a:p>
-          <a:p>
-            <a:r>
-              <a:rPr lang="en-US" sz="1600" dirty="0">
-                <a:solidFill>
-                  <a:srgbClr val="0081E2"/>
-                </a:solidFill>
-                <a:latin typeface="Consolas" panose="020B0609020204030204" pitchFamily="49" charset="0"/>
-              </a:rPr>
-              <a:t>F. Deleting the minimum element in the list</a:t>
-            </a:r>
-          </a:p>
-          <a:p>
-            <a:endParaRPr lang="en-US" sz="1600" dirty="0">
+              <a:rPr lang="en-US" sz="2000" dirty="0">
+                <a:solidFill>
+                  <a:srgbClr val="EB6E19"/>
+                </a:solidFill>
+                <a:latin typeface="Consolas" panose="020B0609020204030204" pitchFamily="49" charset="0"/>
+              </a:rPr>
+              <a:t>            </a:t>
+            </a:r>
+            <a:r>
+              <a:rPr lang="en-US" sz="2000" dirty="0">
+                <a:solidFill>
+                  <a:srgbClr val="00DA63"/>
+                </a:solidFill>
+                <a:latin typeface="Consolas" panose="020B0609020204030204" pitchFamily="49" charset="0"/>
+              </a:rPr>
+              <a:t> A                                    B</a:t>
+            </a:r>
+          </a:p>
+          <a:p>
+            <a:r>
+              <a:rPr lang="en-US" sz="2000" dirty="0">
+                <a:solidFill>
+                  <a:srgbClr val="EB6E19"/>
+                </a:solidFill>
+                <a:latin typeface="Consolas" panose="020B0609020204030204" pitchFamily="49" charset="0"/>
+              </a:rPr>
+              <a:t>for (int i=1; i &lt; n; i++)</a:t>
+            </a:r>
+          </a:p>
+          <a:p>
+            <a:r>
+              <a:rPr lang="en-US" sz="2000" dirty="0">
+                <a:solidFill>
+                  <a:srgbClr val="EB6E19"/>
+                </a:solidFill>
+                <a:latin typeface="Consolas" panose="020B0609020204030204" pitchFamily="49" charset="0"/>
+              </a:rPr>
+              <a:t>	for (int j=1; j &lt; n; </a:t>
+            </a:r>
+            <a:r>
+              <a:rPr lang="en-US" sz="2000" dirty="0" err="1">
+                <a:solidFill>
+                  <a:srgbClr val="EB6E19"/>
+                </a:solidFill>
+                <a:latin typeface="Consolas" panose="020B0609020204030204" pitchFamily="49" charset="0"/>
+              </a:rPr>
+              <a:t>j++</a:t>
+            </a:r>
+            <a:r>
+              <a:rPr lang="en-US" sz="2000" dirty="0">
+                <a:solidFill>
+                  <a:srgbClr val="EB6E19"/>
+                </a:solidFill>
+                <a:latin typeface="Consolas" panose="020B0609020204030204" pitchFamily="49" charset="0"/>
+              </a:rPr>
+              <a:t>)</a:t>
+            </a:r>
+          </a:p>
+          <a:p>
+            <a:r>
+              <a:rPr lang="en-US" sz="2000" dirty="0">
+                <a:solidFill>
+                  <a:srgbClr val="EB6E19"/>
+                </a:solidFill>
+                <a:latin typeface="Consolas" panose="020B0609020204030204" pitchFamily="49" charset="0"/>
+              </a:rPr>
+              <a:t>		sum = sum + 1;</a:t>
+            </a:r>
+          </a:p>
+          <a:p>
+            <a:endParaRPr lang="en-US" sz="2000" dirty="0">
               <a:solidFill>
-                <a:srgbClr val="0081E2"/>
+                <a:srgbClr val="EB6E19"/>
               </a:solidFill>
               <a:latin typeface="Consolas" panose="020B0609020204030204" pitchFamily="49" charset="0"/>
             </a:endParaRPr>
           </a:p>
+          <a:p>
+            <a:endParaRPr lang="en-US" sz="2000" dirty="0">
+              <a:solidFill>
+                <a:srgbClr val="EB6E19"/>
+              </a:solidFill>
+              <a:latin typeface="Consolas" panose="020B0609020204030204" pitchFamily="49" charset="0"/>
+            </a:endParaRPr>
+          </a:p>
+          <a:p>
+            <a:r>
+              <a:rPr lang="en-US" sz="2000" dirty="0">
+                <a:solidFill>
+                  <a:srgbClr val="00DA63"/>
+                </a:solidFill>
+                <a:latin typeface="Consolas" panose="020B0609020204030204" pitchFamily="49" charset="0"/>
+              </a:rPr>
+              <a:t>Answer: A and B grow at the same rate </a:t>
+            </a:r>
+            <a:r>
+              <a:rPr lang="en-US" sz="2000" dirty="0" err="1">
+                <a:solidFill>
+                  <a:srgbClr val="00DA63"/>
+                </a:solidFill>
+                <a:latin typeface="Consolas" panose="020B0609020204030204" pitchFamily="49" charset="0"/>
+              </a:rPr>
+              <a:t>asymtotically</a:t>
+            </a:r>
+            <a:endParaRPr lang="en-US" sz="2000" dirty="0">
+              <a:solidFill>
+                <a:srgbClr val="00DA63"/>
+              </a:solidFill>
+              <a:latin typeface="Consolas" panose="020B0609020204030204" pitchFamily="49" charset="0"/>
+            </a:endParaRPr>
+          </a:p>
+        </p:txBody>
+      </p:sp>
+      <p:sp>
+        <p:nvSpPr>
+          <p:cNvPr id="7" name="TextBox 6">
+            <a:extLst>
+              <a:ext uri="{FF2B5EF4-FFF2-40B4-BE49-F238E27FC236}">
+                <a16:creationId xmlns:a16="http://schemas.microsoft.com/office/drawing/2014/main" id="{92A4DF68-D3B8-4D4F-85C6-D314CAD1A865}"/>
+              </a:ext>
+            </a:extLst>
+          </p:cNvPr>
+          <p:cNvSpPr txBox="1"/>
+          <p:nvPr/>
+        </p:nvSpPr>
+        <p:spPr>
+          <a:xfrm>
+            <a:off x="6297419" y="3059496"/>
+            <a:ext cx="6094324" cy="923330"/>
+          </a:xfrm>
+          <a:prstGeom prst="rect">
+            <a:avLst/>
+          </a:prstGeom>
+          <a:noFill/>
+        </p:spPr>
+        <p:txBody>
+          <a:bodyPr wrap="square">
+            <a:spAutoFit/>
+          </a:bodyPr>
+          <a:lstStyle/>
+          <a:p>
+            <a:r>
+              <a:rPr lang="en-US" sz="1800" dirty="0">
+                <a:solidFill>
+                  <a:srgbClr val="EB6E19"/>
+                </a:solidFill>
+                <a:latin typeface="Consolas" panose="020B0609020204030204" pitchFamily="49" charset="0"/>
+              </a:rPr>
+              <a:t>for (int i=1; i &lt; 2n; i++)</a:t>
+            </a:r>
+          </a:p>
+          <a:p>
+            <a:r>
+              <a:rPr lang="en-US" sz="1800" dirty="0">
+                <a:solidFill>
+                  <a:srgbClr val="EB6E19"/>
+                </a:solidFill>
+                <a:latin typeface="Consolas" panose="020B0609020204030204" pitchFamily="49" charset="0"/>
+              </a:rPr>
+              <a:t>	for (int j=1; j &lt; 2n; </a:t>
+            </a:r>
+            <a:r>
+              <a:rPr lang="en-US" sz="1800" dirty="0" err="1">
+                <a:solidFill>
+                  <a:srgbClr val="EB6E19"/>
+                </a:solidFill>
+                <a:latin typeface="Consolas" panose="020B0609020204030204" pitchFamily="49" charset="0"/>
+              </a:rPr>
+              <a:t>j++</a:t>
+            </a:r>
+            <a:r>
+              <a:rPr lang="en-US" sz="1800" dirty="0">
+                <a:solidFill>
+                  <a:srgbClr val="EB6E19"/>
+                </a:solidFill>
+                <a:latin typeface="Consolas" panose="020B0609020204030204" pitchFamily="49" charset="0"/>
+              </a:rPr>
+              <a:t>)</a:t>
+            </a:r>
+          </a:p>
+          <a:p>
+            <a:r>
+              <a:rPr lang="en-US" sz="1800" dirty="0">
+                <a:solidFill>
+                  <a:srgbClr val="EB6E19"/>
+                </a:solidFill>
+                <a:latin typeface="Consolas" panose="020B0609020204030204" pitchFamily="49" charset="0"/>
+              </a:rPr>
+              <a:t>		sum = sum + 1;</a:t>
+            </a:r>
+          </a:p>
         </p:txBody>
       </p:sp>
     </p:spTree>
     <p:extLst>
       <p:ext uri="{BB962C8B-B14F-4D97-AF65-F5344CB8AC3E}">
-        <p14:creationId xmlns:p14="http://schemas.microsoft.com/office/powerpoint/2010/main" val="1671614239"/>
+        <p14:creationId xmlns:p14="http://schemas.microsoft.com/office/powerpoint/2010/main" val="2651317974"/>
       </p:ext>
     </p:extLst>
   </p:cSld>
@@ -15888,16 +15925,18 @@
                 </a:solidFill>
                 <a:latin typeface="Consolas" panose="020B0609020204030204" pitchFamily="49" charset="0"/>
               </a:rPr>
-              <a:t>A. Insert an item </a:t>
-            </a:r>
+              <a:t>A. Insert an item</a:t>
+            </a:r>
+          </a:p>
+          <a:p>
             <a:r>
               <a:rPr lang="en-US" sz="1600" dirty="0">
                 <a:solidFill>
-                  <a:srgbClr val="EB6E19"/>
-                </a:solidFill>
-                <a:latin typeface="Consolas" panose="020B0609020204030204" pitchFamily="49" charset="0"/>
-              </a:rPr>
-              <a:t>: O(n)</a:t>
+                  <a:srgbClr val="0081E2"/>
+                </a:solidFill>
+                <a:latin typeface="Consolas" panose="020B0609020204030204" pitchFamily="49" charset="0"/>
+              </a:rPr>
+              <a:t>B. Finding the minimum element</a:t>
             </a:r>
           </a:p>
           <a:p>
@@ -15908,16 +15947,18 @@
                 </a:solidFill>
                 <a:latin typeface="Consolas" panose="020B0609020204030204" pitchFamily="49" charset="0"/>
               </a:rPr>
-              <a:t>B. Finding the minimum element </a:t>
-            </a:r>
+              <a:t>C. Delete the largest element from list</a:t>
+            </a:r>
+          </a:p>
+          <a:p>
             <a:r>
               <a:rPr lang="en-US" sz="1600" dirty="0">
                 <a:solidFill>
-                  <a:srgbClr val="EB6E19"/>
-                </a:solidFill>
-                <a:latin typeface="Consolas" panose="020B0609020204030204" pitchFamily="49" charset="0"/>
-              </a:rPr>
-              <a:t>: O(1)</a:t>
+                  <a:srgbClr val="0081E2"/>
+                </a:solidFill>
+                <a:latin typeface="Consolas" panose="020B0609020204030204" pitchFamily="49" charset="0"/>
+              </a:rPr>
+              <a:t>D. Finding the largest element</a:t>
             </a:r>
           </a:p>
           <a:p>
@@ -15928,85 +15969,19 @@
                 </a:solidFill>
                 <a:latin typeface="Consolas" panose="020B0609020204030204" pitchFamily="49" charset="0"/>
               </a:rPr>
-              <a:t>C. Delete the largest element from list </a:t>
-            </a:r>
+              <a:t>E. Finding a random element, n</a:t>
+            </a:r>
+          </a:p>
+          <a:p>
             <a:r>
               <a:rPr lang="en-US" sz="1600" dirty="0">
                 <a:solidFill>
-                  <a:srgbClr val="EB6E19"/>
-                </a:solidFill>
-                <a:latin typeface="Consolas" panose="020B0609020204030204" pitchFamily="49" charset="0"/>
-              </a:rPr>
-              <a:t>: O(n)</a:t>
-            </a:r>
-          </a:p>
-          <a:p>
-            <a:r>
-              <a:rPr lang="en-US" sz="1600" dirty="0">
-                <a:solidFill>
                   <a:srgbClr val="0081E2"/>
                 </a:solidFill>
                 <a:latin typeface="Consolas" panose="020B0609020204030204" pitchFamily="49" charset="0"/>
               </a:rPr>
-              <a:t>D. Finding the largest element </a:t>
-            </a:r>
-            <a:r>
-              <a:rPr lang="en-US" sz="1600" dirty="0">
-                <a:solidFill>
-                  <a:srgbClr val="EB6E19"/>
-                </a:solidFill>
-                <a:latin typeface="Consolas" panose="020B0609020204030204" pitchFamily="49" charset="0"/>
-              </a:rPr>
-              <a:t>: O(n)</a:t>
-            </a:r>
-          </a:p>
-          <a:p>
-            <a:r>
-              <a:rPr lang="en-US" sz="1600" dirty="0">
-                <a:solidFill>
-                  <a:srgbClr val="0081E2"/>
-                </a:solidFill>
-                <a:latin typeface="Consolas" panose="020B0609020204030204" pitchFamily="49" charset="0"/>
-              </a:rPr>
-              <a:t>E. Finding a random element, n </a:t>
-            </a:r>
-            <a:r>
-              <a:rPr lang="en-US" sz="1600" dirty="0">
-                <a:solidFill>
-                  <a:srgbClr val="EB6E19"/>
-                </a:solidFill>
-                <a:latin typeface="Consolas" panose="020B0609020204030204" pitchFamily="49" charset="0"/>
-              </a:rPr>
-              <a:t>: O(n)</a:t>
-            </a:r>
-          </a:p>
-          <a:p>
-            <a:r>
-              <a:rPr lang="en-US" sz="1600" dirty="0">
-                <a:solidFill>
-                  <a:srgbClr val="0081E2"/>
-                </a:solidFill>
-                <a:latin typeface="Consolas" panose="020B0609020204030204" pitchFamily="49" charset="0"/>
-              </a:rPr>
-              <a:t>F. Deleting the minimum element in the list </a:t>
-            </a:r>
-            <a:r>
-              <a:rPr lang="en-US" sz="1600" dirty="0">
-                <a:solidFill>
-                  <a:srgbClr val="EB6E19"/>
-                </a:solidFill>
-                <a:latin typeface="Consolas" panose="020B0609020204030204" pitchFamily="49" charset="0"/>
-              </a:rPr>
-              <a:t>: O(1)</a:t>
-            </a:r>
-          </a:p>
-          <a:p>
-            <a:endParaRPr lang="en-US" sz="1600" dirty="0">
-              <a:solidFill>
-                <a:srgbClr val="EB6E19"/>
-              </a:solidFill>
-              <a:latin typeface="Consolas" panose="020B0609020204030204" pitchFamily="49" charset="0"/>
-            </a:endParaRPr>
+              <a:t>F. Deleting the minimum element in the list</a:t>
+            </a:r>
           </a:p>
           <a:p>
             <a:endParaRPr lang="en-US" sz="1600" dirty="0">
@@ -16021,7 +15996,7 @@
     </p:spTree>
     <p:extLst>
       <p:ext uri="{BB962C8B-B14F-4D97-AF65-F5344CB8AC3E}">
-        <p14:creationId xmlns:p14="http://schemas.microsoft.com/office/powerpoint/2010/main" val="3075079372"/>
+        <p14:creationId xmlns:p14="http://schemas.microsoft.com/office/powerpoint/2010/main" val="1671614239"/>
       </p:ext>
     </p:extLst>
   </p:cSld>
@@ -16086,7 +16061,7 @@
                 </a:solidFill>
                 <a:latin typeface="Gotham Bold" pitchFamily="50" charset="0"/>
               </a:rPr>
-              <a:t>Mini Review – Stacks</a:t>
+              <a:t>Mini Review – Linked Lists</a:t>
             </a:r>
           </a:p>
         </p:txBody>
@@ -16108,7 +16083,7 @@
         <p:spPr>
           <a:xfrm>
             <a:off x="940881" y="1690688"/>
-            <a:ext cx="10978592" cy="5057971"/>
+            <a:ext cx="9790759" cy="5057971"/>
           </a:xfrm>
           <a:prstGeom prst="rect">
             <a:avLst/>
@@ -16221,16 +16196,46 @@
                 </a:solidFill>
                 <a:latin typeface="Consolas" panose="020B0609020204030204" pitchFamily="49" charset="0"/>
               </a:rPr>
-              <a:t>Postfix Evaluation “2 3 1 * + 9 -“. We scan all elements one by one.</a:t>
-            </a:r>
-            <a:br>
+              <a:t>Consider a class List that implements an </a:t>
+            </a:r>
+            <a:r>
               <a:rPr lang="en-US" sz="1600" dirty="0">
                 <a:solidFill>
+                  <a:srgbClr val="EB6E19"/>
+                </a:solidFill>
+                <a:latin typeface="Consolas" panose="020B0609020204030204" pitchFamily="49" charset="0"/>
+              </a:rPr>
+              <a:t>ordered</a:t>
+            </a:r>
+            <a:r>
+              <a:rPr lang="en-US" sz="1600" dirty="0">
+                <a:solidFill>
                   <a:srgbClr val="0081E2"/>
                 </a:solidFill>
                 <a:latin typeface="Consolas" panose="020B0609020204030204" pitchFamily="49" charset="0"/>
               </a:rPr>
-            </a:br>
+              <a:t> list backed by a singly linked list with a head pointer. The invariant “</a:t>
+            </a:r>
+            <a:r>
+              <a:rPr lang="en-US" sz="1600" dirty="0">
+                <a:solidFill>
+                  <a:srgbClr val="EB6E19"/>
+                </a:solidFill>
+                <a:latin typeface="Consolas" panose="020B0609020204030204" pitchFamily="49" charset="0"/>
+              </a:rPr>
+              <a:t>ordered</a:t>
+            </a:r>
+            <a:r>
+              <a:rPr lang="en-US" sz="1600" dirty="0">
+                <a:solidFill>
+                  <a:srgbClr val="0081E2"/>
+                </a:solidFill>
+                <a:latin typeface="Consolas" panose="020B0609020204030204" pitchFamily="49" charset="0"/>
+              </a:rPr>
+              <a:t>” is maintained always. Given that representation, what is the worst-case time complexity of the following operations? Assume the list is sorted in ascending order.</a:t>
+            </a:r>
+          </a:p>
+          <a:p>
             <a:endParaRPr lang="en-US" sz="1600" dirty="0">
               <a:solidFill>
                 <a:srgbClr val="0081E2"/>
@@ -16238,12 +16243,148 @@
               <a:latin typeface="Consolas" panose="020B0609020204030204" pitchFamily="49" charset="0"/>
             </a:endParaRPr>
           </a:p>
+          <a:p>
+            <a:r>
+              <a:rPr lang="en-US" sz="1600" dirty="0">
+                <a:solidFill>
+                  <a:srgbClr val="0081E2"/>
+                </a:solidFill>
+                <a:latin typeface="Consolas" panose="020B0609020204030204" pitchFamily="49" charset="0"/>
+              </a:rPr>
+              <a:t>A. Insert an item </a:t>
+            </a:r>
+            <a:r>
+              <a:rPr lang="en-US" sz="1600" dirty="0">
+                <a:solidFill>
+                  <a:srgbClr val="EB6E19"/>
+                </a:solidFill>
+                <a:latin typeface="Consolas" panose="020B0609020204030204" pitchFamily="49" charset="0"/>
+              </a:rPr>
+              <a:t>: O(n)</a:t>
+            </a:r>
+          </a:p>
+          <a:p>
+            <a:r>
+              <a:rPr lang="en-US" sz="1600" dirty="0">
+                <a:solidFill>
+                  <a:srgbClr val="0081E2"/>
+                </a:solidFill>
+                <a:latin typeface="Consolas" panose="020B0609020204030204" pitchFamily="49" charset="0"/>
+              </a:rPr>
+              <a:t>B. Finding the minimum element </a:t>
+            </a:r>
+            <a:r>
+              <a:rPr lang="en-US" sz="1600" dirty="0">
+                <a:solidFill>
+                  <a:srgbClr val="EB6E19"/>
+                </a:solidFill>
+                <a:latin typeface="Consolas" panose="020B0609020204030204" pitchFamily="49" charset="0"/>
+              </a:rPr>
+              <a:t>: O(1)</a:t>
+            </a:r>
+          </a:p>
+          <a:p>
+            <a:r>
+              <a:rPr lang="en-US" sz="1600" dirty="0">
+                <a:solidFill>
+                  <a:srgbClr val="0081E2"/>
+                </a:solidFill>
+                <a:latin typeface="Consolas" panose="020B0609020204030204" pitchFamily="49" charset="0"/>
+              </a:rPr>
+              <a:t>C. Delete the largest element from list </a:t>
+            </a:r>
+            <a:r>
+              <a:rPr lang="en-US" sz="1600" dirty="0">
+                <a:solidFill>
+                  <a:srgbClr val="EB6E19"/>
+                </a:solidFill>
+                <a:latin typeface="Consolas" panose="020B0609020204030204" pitchFamily="49" charset="0"/>
+              </a:rPr>
+              <a:t>: O(n)</a:t>
+            </a:r>
+          </a:p>
+          <a:p>
+            <a:r>
+              <a:rPr lang="en-US" sz="1600" dirty="0">
+                <a:solidFill>
+                  <a:srgbClr val="0081E2"/>
+                </a:solidFill>
+                <a:latin typeface="Consolas" panose="020B0609020204030204" pitchFamily="49" charset="0"/>
+              </a:rPr>
+              <a:t>D. Finding the largest element </a:t>
+            </a:r>
+            <a:r>
+              <a:rPr lang="en-US" sz="1600" dirty="0">
+                <a:solidFill>
+                  <a:srgbClr val="EB6E19"/>
+                </a:solidFill>
+                <a:latin typeface="Consolas" panose="020B0609020204030204" pitchFamily="49" charset="0"/>
+              </a:rPr>
+              <a:t>: O(n)</a:t>
+            </a:r>
+          </a:p>
+          <a:p>
+            <a:r>
+              <a:rPr lang="en-US" sz="1600" dirty="0">
+                <a:solidFill>
+                  <a:srgbClr val="0081E2"/>
+                </a:solidFill>
+                <a:latin typeface="Consolas" panose="020B0609020204030204" pitchFamily="49" charset="0"/>
+              </a:rPr>
+              <a:t>E. Finding a random element, n </a:t>
+            </a:r>
+            <a:r>
+              <a:rPr lang="en-US" sz="1600" dirty="0">
+                <a:solidFill>
+                  <a:srgbClr val="EB6E19"/>
+                </a:solidFill>
+                <a:latin typeface="Consolas" panose="020B0609020204030204" pitchFamily="49" charset="0"/>
+              </a:rPr>
+              <a:t>: O(n)</a:t>
+            </a:r>
+          </a:p>
+          <a:p>
+            <a:r>
+              <a:rPr lang="en-US" sz="1600" dirty="0">
+                <a:solidFill>
+                  <a:srgbClr val="0081E2"/>
+                </a:solidFill>
+                <a:latin typeface="Consolas" panose="020B0609020204030204" pitchFamily="49" charset="0"/>
+              </a:rPr>
+              <a:t>F. Deleting the minimum element in the list </a:t>
+            </a:r>
+            <a:r>
+              <a:rPr lang="en-US" sz="1600" dirty="0">
+                <a:solidFill>
+                  <a:srgbClr val="EB6E19"/>
+                </a:solidFill>
+                <a:latin typeface="Consolas" panose="020B0609020204030204" pitchFamily="49" charset="0"/>
+              </a:rPr>
+              <a:t>: O(1)</a:t>
+            </a:r>
+          </a:p>
+          <a:p>
+            <a:endParaRPr lang="en-US" sz="1600" dirty="0">
+              <a:solidFill>
+                <a:srgbClr val="EB6E19"/>
+              </a:solidFill>
+              <a:latin typeface="Consolas" panose="020B0609020204030204" pitchFamily="49" charset="0"/>
+            </a:endParaRPr>
+          </a:p>
+          <a:p>
+            <a:endParaRPr lang="en-US" sz="1600" dirty="0">
+              <a:solidFill>
+                <a:srgbClr val="0081E2"/>
+              </a:solidFill>
+              <a:latin typeface="Consolas" panose="020B0609020204030204" pitchFamily="49" charset="0"/>
+            </a:endParaRPr>
+          </a:p>
         </p:txBody>
       </p:sp>
     </p:spTree>
     <p:extLst>
       <p:ext uri="{BB962C8B-B14F-4D97-AF65-F5344CB8AC3E}">
-        <p14:creationId xmlns:p14="http://schemas.microsoft.com/office/powerpoint/2010/main" val="2199279301"/>
+        <p14:creationId xmlns:p14="http://schemas.microsoft.com/office/powerpoint/2010/main" val="3075079372"/>
       </p:ext>
     </p:extLst>
   </p:cSld>
@@ -16445,8 +16586,6 @@
               </a:rPr>
               <a:t>Postfix Evaluation “2 3 1 * + 9 -“. We scan all elements one by one.</a:t>
             </a:r>
-          </a:p>
-          <a:p>
             <a:br>
               <a:rPr lang="en-US" sz="1600" dirty="0">
                 <a:solidFill>
@@ -16455,141 +16594,19 @@
                 <a:latin typeface="Consolas" panose="020B0609020204030204" pitchFamily="49" charset="0"/>
               </a:rPr>
             </a:br>
-            <a:r>
-              <a:rPr lang="en-US" sz="1600" dirty="0">
-                <a:solidFill>
-                  <a:srgbClr val="EB6E19"/>
-                </a:solidFill>
-                <a:latin typeface="Consolas" panose="020B0609020204030204" pitchFamily="49" charset="0"/>
-              </a:rPr>
-              <a:t>1) Scan ‘2’, it’s a number, so push it to stack. Stack contains ‘2’</a:t>
-            </a:r>
-            <a:br>
-              <a:rPr lang="en-US" sz="1600" dirty="0">
-                <a:solidFill>
-                  <a:srgbClr val="EB6E19"/>
-                </a:solidFill>
-                <a:latin typeface="Consolas" panose="020B0609020204030204" pitchFamily="49" charset="0"/>
-              </a:rPr>
-            </a:br>
-            <a:r>
-              <a:rPr lang="en-US" sz="1600" dirty="0">
-                <a:solidFill>
-                  <a:srgbClr val="EB6E19"/>
-                </a:solidFill>
-                <a:latin typeface="Consolas" panose="020B0609020204030204" pitchFamily="49" charset="0"/>
-              </a:rPr>
-              <a:t>2) Scan ‘3’, again a number, push it to stack, stack now contains ‘2 3’ (from bottom to top)</a:t>
-            </a:r>
-            <a:br>
-              <a:rPr lang="en-US" sz="1600" dirty="0">
-                <a:solidFill>
-                  <a:srgbClr val="EB6E19"/>
-                </a:solidFill>
-                <a:latin typeface="Consolas" panose="020B0609020204030204" pitchFamily="49" charset="0"/>
-              </a:rPr>
-            </a:br>
-            <a:r>
-              <a:rPr lang="en-US" sz="1600" dirty="0">
-                <a:solidFill>
-                  <a:srgbClr val="EB6E19"/>
-                </a:solidFill>
-                <a:latin typeface="Consolas" panose="020B0609020204030204" pitchFamily="49" charset="0"/>
-              </a:rPr>
-              <a:t>3) Scan ‘1’, again a number, push it to stack, stack now contains ‘2 3 1’</a:t>
-            </a:r>
-            <a:br>
-              <a:rPr lang="en-US" sz="1600" dirty="0">
-                <a:solidFill>
-                  <a:srgbClr val="EB6E19"/>
-                </a:solidFill>
-                <a:latin typeface="Consolas" panose="020B0609020204030204" pitchFamily="49" charset="0"/>
-              </a:rPr>
-            </a:br>
-            <a:r>
-              <a:rPr lang="en-US" sz="1600" dirty="0">
-                <a:solidFill>
-                  <a:srgbClr val="EB6E19"/>
-                </a:solidFill>
-                <a:latin typeface="Consolas" panose="020B0609020204030204" pitchFamily="49" charset="0"/>
-              </a:rPr>
-              <a:t>4) Scan ‘*’, it’s an operator, pop two operands from stack, apply the * operator on operands, we get 3*1 which results in 3. We push the result ‘3’ to stack. Stack now becomes ‘2 3’.</a:t>
-            </a:r>
-            <a:br>
-              <a:rPr lang="en-US" sz="1600" dirty="0">
-                <a:solidFill>
-                  <a:srgbClr val="EB6E19"/>
-                </a:solidFill>
-                <a:latin typeface="Consolas" panose="020B0609020204030204" pitchFamily="49" charset="0"/>
-              </a:rPr>
-            </a:br>
-            <a:r>
-              <a:rPr lang="en-US" sz="1600" dirty="0">
-                <a:solidFill>
-                  <a:srgbClr val="EB6E19"/>
-                </a:solidFill>
-                <a:latin typeface="Consolas" panose="020B0609020204030204" pitchFamily="49" charset="0"/>
-              </a:rPr>
-              <a:t>5) Scan ‘+’, it’s an operator, pop two operands from stack, apply the + operator on operands, we get 3 + 2 which results in 5. We push the result ‘5’ to stack. Stack now becomes ‘5’.</a:t>
-            </a:r>
-            <a:br>
-              <a:rPr lang="en-US" sz="1600" dirty="0">
-                <a:solidFill>
-                  <a:srgbClr val="EB6E19"/>
-                </a:solidFill>
-                <a:latin typeface="Consolas" panose="020B0609020204030204" pitchFamily="49" charset="0"/>
-              </a:rPr>
-            </a:br>
-            <a:r>
-              <a:rPr lang="en-US" sz="1600" dirty="0">
-                <a:solidFill>
-                  <a:srgbClr val="EB6E19"/>
-                </a:solidFill>
-                <a:latin typeface="Consolas" panose="020B0609020204030204" pitchFamily="49" charset="0"/>
-              </a:rPr>
-              <a:t>6) Scan ‘9’, it’s a number, we push it to the stack. Stack now becomes ‘5 9’.</a:t>
-            </a:r>
-            <a:br>
-              <a:rPr lang="en-US" sz="1600" dirty="0">
-                <a:solidFill>
-                  <a:srgbClr val="EB6E19"/>
-                </a:solidFill>
-                <a:latin typeface="Consolas" panose="020B0609020204030204" pitchFamily="49" charset="0"/>
-              </a:rPr>
-            </a:br>
-            <a:r>
-              <a:rPr lang="en-US" sz="1600" dirty="0">
-                <a:solidFill>
-                  <a:srgbClr val="EB6E19"/>
-                </a:solidFill>
-                <a:latin typeface="Consolas" panose="020B0609020204030204" pitchFamily="49" charset="0"/>
-              </a:rPr>
-              <a:t>7) Scan ‘-‘, it’s an operator, pop two operands from stack, apply the – operator on operands, we get 5 – 9 which results in -4. We push the result ‘-4’ to stack. Stack now becomes ‘-4’.</a:t>
-            </a:r>
-            <a:br>
-              <a:rPr lang="en-US" sz="1600" dirty="0">
-                <a:solidFill>
-                  <a:srgbClr val="EB6E19"/>
-                </a:solidFill>
-                <a:latin typeface="Consolas" panose="020B0609020204030204" pitchFamily="49" charset="0"/>
-              </a:rPr>
-            </a:br>
-            <a:r>
-              <a:rPr lang="en-US" sz="1600" dirty="0">
-                <a:solidFill>
-                  <a:srgbClr val="EB6E19"/>
-                </a:solidFill>
-                <a:latin typeface="Consolas" panose="020B0609020204030204" pitchFamily="49" charset="0"/>
-              </a:rPr>
-              <a:t>8) There are no more elements to scan, we return the top element from stack (which is the only element left in stack).</a:t>
-            </a:r>
+            <a:endParaRPr lang="en-US" sz="1600" dirty="0">
+              <a:solidFill>
+                <a:srgbClr val="0081E2"/>
+              </a:solidFill>
+              <a:latin typeface="Consolas" panose="020B0609020204030204" pitchFamily="49" charset="0"/>
+            </a:endParaRPr>
           </a:p>
         </p:txBody>
       </p:sp>
     </p:spTree>
     <p:extLst>
       <p:ext uri="{BB962C8B-B14F-4D97-AF65-F5344CB8AC3E}">
-        <p14:creationId xmlns:p14="http://schemas.microsoft.com/office/powerpoint/2010/main" val="3921623338"/>
+        <p14:creationId xmlns:p14="http://schemas.microsoft.com/office/powerpoint/2010/main" val="2199279301"/>
       </p:ext>
     </p:extLst>
   </p:cSld>
@@ -16654,7 +16671,7 @@
                 </a:solidFill>
                 <a:latin typeface="Gotham Bold" pitchFamily="50" charset="0"/>
               </a:rPr>
-              <a:t>Output Prediction / Coding Questions</a:t>
+              <a:t>Mini Review – Stacks</a:t>
             </a:r>
           </a:p>
         </p:txBody>
@@ -16788,72 +16805,146 @@
                   <a:srgbClr val="0081E2"/>
                 </a:solidFill>
                 <a:latin typeface="Consolas" panose="020B0609020204030204" pitchFamily="49" charset="0"/>
-                <a:hlinkClick r:id="rId3">
-                  <a:extLst>
-                    <a:ext uri="{A12FA001-AC4F-418D-AE19-62706E023703}">
-                      <ahyp:hlinkClr xmlns:ahyp="http://schemas.microsoft.com/office/drawing/2018/hyperlinkcolor" val="tx"/>
-                    </a:ext>
-                  </a:extLst>
-                </a:hlinkClick>
-              </a:rPr>
-              <a:t>https://onlinegdb.com/BJ4hyD7vP</a:t>
-            </a:r>
-            <a:endParaRPr lang="en-US" sz="1600" dirty="0">
-              <a:solidFill>
-                <a:srgbClr val="0081E2"/>
-              </a:solidFill>
-              <a:latin typeface="Consolas" panose="020B0609020204030204" pitchFamily="49" charset="0"/>
-            </a:endParaRPr>
-          </a:p>
-          <a:p>
-            <a:r>
+              </a:rPr>
+              <a:t>Postfix Evaluation “2 3 1 * + 9 -“. We scan all elements one by one.</a:t>
+            </a:r>
+          </a:p>
+          <a:p>
+            <a:br>
               <a:rPr lang="en-US" sz="1600" dirty="0">
                 <a:solidFill>
                   <a:srgbClr val="0081E2"/>
                 </a:solidFill>
                 <a:latin typeface="Consolas" panose="020B0609020204030204" pitchFamily="49" charset="0"/>
-                <a:hlinkClick r:id="rId4">
-                  <a:extLst>
-                    <a:ext uri="{A12FA001-AC4F-418D-AE19-62706E023703}">
-                      <ahyp:hlinkClr xmlns:ahyp="http://schemas.microsoft.com/office/drawing/2018/hyperlinkcolor" val="tx"/>
-                    </a:ext>
-                  </a:extLst>
-                </a:hlinkClick>
-              </a:rPr>
-              <a:t>https://onlinegdb.com/BJ6gewQDP</a:t>
-            </a:r>
-            <a:endParaRPr lang="en-US" sz="1600" dirty="0">
-              <a:solidFill>
-                <a:srgbClr val="0081E2"/>
-              </a:solidFill>
-              <a:latin typeface="Consolas" panose="020B0609020204030204" pitchFamily="49" charset="0"/>
-            </a:endParaRPr>
-          </a:p>
-          <a:p>
+              </a:rPr>
+            </a:br>
             <a:r>
               <a:rPr lang="en-US" sz="1600" dirty="0">
                 <a:solidFill>
-                  <a:srgbClr val="0081E2"/>
-                </a:solidFill>
-                <a:latin typeface="Consolas" panose="020B0609020204030204" pitchFamily="49" charset="0"/>
-                <a:hlinkClick r:id="rId5">
-                  <a:extLst>
-                    <a:ext uri="{A12FA001-AC4F-418D-AE19-62706E023703}">
-                      <ahyp:hlinkClr xmlns:ahyp="http://schemas.microsoft.com/office/drawing/2018/hyperlinkcolor" val="tx"/>
-                    </a:ext>
-                  </a:extLst>
-                </a:hlinkClick>
-              </a:rPr>
-              <a:t>https://onlinegdb.com/OefiHIntV</a:t>
-            </a:r>
-            <a:r>
+                  <a:srgbClr val="EB6E19"/>
+                </a:solidFill>
+                <a:latin typeface="Consolas" panose="020B0609020204030204" pitchFamily="49" charset="0"/>
+              </a:rPr>
+              <a:t>1) Scan ‘2’, it’s a number, so push it to stack. Stack contains ‘2’</a:t>
+            </a:r>
+            <a:br>
               <a:rPr lang="en-US" sz="1600" dirty="0">
                 <a:solidFill>
-                  <a:srgbClr val="0081E2"/>
-                </a:solidFill>
-                <a:latin typeface="Consolas" panose="020B0609020204030204" pitchFamily="49" charset="0"/>
-              </a:rPr>
-              <a:t>  </a:t>
+                  <a:srgbClr val="EB6E19"/>
+                </a:solidFill>
+                <a:latin typeface="Consolas" panose="020B0609020204030204" pitchFamily="49" charset="0"/>
+              </a:rPr>
+            </a:br>
+            <a:r>
+              <a:rPr lang="en-US" sz="1600" dirty="0">
+                <a:solidFill>
+                  <a:srgbClr val="EB6E19"/>
+                </a:solidFill>
+                <a:latin typeface="Consolas" panose="020B0609020204030204" pitchFamily="49" charset="0"/>
+              </a:rPr>
+              <a:t>2) Scan ‘3’, again a number, push it to stack, stack now contains ‘2 3’ (from bottom to top)</a:t>
+            </a:r>
+            <a:br>
+              <a:rPr lang="en-US" sz="1600" dirty="0">
+                <a:solidFill>
+                  <a:srgbClr val="EB6E19"/>
+                </a:solidFill>
+                <a:latin typeface="Consolas" panose="020B0609020204030204" pitchFamily="49" charset="0"/>
+              </a:rPr>
+            </a:br>
+            <a:r>
+              <a:rPr lang="en-US" sz="1600" dirty="0">
+                <a:solidFill>
+                  <a:srgbClr val="EB6E19"/>
+                </a:solidFill>
+                <a:latin typeface="Consolas" panose="020B0609020204030204" pitchFamily="49" charset="0"/>
+              </a:rPr>
+              <a:t>3) Scan ‘1’, again a number, push it to stack, stack now contains ‘2 3 1’</a:t>
+            </a:r>
+            <a:br>
+              <a:rPr lang="en-US" sz="1600" dirty="0">
+                <a:solidFill>
+                  <a:srgbClr val="EB6E19"/>
+                </a:solidFill>
+                <a:latin typeface="Consolas" panose="020B0609020204030204" pitchFamily="49" charset="0"/>
+              </a:rPr>
+            </a:br>
+            <a:r>
+              <a:rPr lang="en-US" sz="1600" dirty="0">
+                <a:solidFill>
+                  <a:srgbClr val="EB6E19"/>
+                </a:solidFill>
+                <a:latin typeface="Consolas" panose="020B0609020204030204" pitchFamily="49" charset="0"/>
+              </a:rPr>
+              <a:t>4) Scan ‘*’, it’s an operator, pop two operands from stack, apply the * operator on operands, we get 3*1 which results in 3. We push the result ‘3’ to stack. Stack now becomes ‘2 3’.</a:t>
+            </a:r>
+            <a:br>
+              <a:rPr lang="en-US" sz="1600" dirty="0">
+                <a:solidFill>
+                  <a:srgbClr val="EB6E19"/>
+                </a:solidFill>
+                <a:latin typeface="Consolas" panose="020B0609020204030204" pitchFamily="49" charset="0"/>
+              </a:rPr>
+            </a:br>
+            <a:r>
+              <a:rPr lang="en-US" sz="1600" dirty="0">
+                <a:solidFill>
+                  <a:srgbClr val="EB6E19"/>
+                </a:solidFill>
+                <a:latin typeface="Consolas" panose="020B0609020204030204" pitchFamily="49" charset="0"/>
+              </a:rPr>
+              <a:t>5) Scan ‘+’, it’s an operator, pop two operands from stack, apply the + operator on operands, we get 3 + 2 which results in 5. We push the result ‘5’ to stack. Stack now becomes ‘5’.</a:t>
+            </a:r>
+            <a:br>
+              <a:rPr lang="en-US" sz="1600" dirty="0">
+                <a:solidFill>
+                  <a:srgbClr val="EB6E19"/>
+                </a:solidFill>
+                <a:latin typeface="Consolas" panose="020B0609020204030204" pitchFamily="49" charset="0"/>
+              </a:rPr>
+            </a:br>
+            <a:r>
+              <a:rPr lang="en-US" sz="1600" dirty="0">
+                <a:solidFill>
+                  <a:srgbClr val="EB6E19"/>
+                </a:solidFill>
+                <a:latin typeface="Consolas" panose="020B0609020204030204" pitchFamily="49" charset="0"/>
+              </a:rPr>
+              <a:t>6) Scan ‘9’, it’s a number, we push it to the stack. Stack now becomes ‘5 9’.</a:t>
+            </a:r>
+            <a:br>
+              <a:rPr lang="en-US" sz="1600" dirty="0">
+                <a:solidFill>
+                  <a:srgbClr val="EB6E19"/>
+                </a:solidFill>
+                <a:latin typeface="Consolas" panose="020B0609020204030204" pitchFamily="49" charset="0"/>
+              </a:rPr>
+            </a:br>
+            <a:r>
+              <a:rPr lang="en-US" sz="1600" dirty="0">
+                <a:solidFill>
+                  <a:srgbClr val="EB6E19"/>
+                </a:solidFill>
+                <a:latin typeface="Consolas" panose="020B0609020204030204" pitchFamily="49" charset="0"/>
+              </a:rPr>
+              <a:t>7) Scan ‘-‘, it’s an operator, pop two operands from stack, apply the – operator on operands, we get 5 – 9 which results in -4. We push the result ‘-4’ to stack. Stack now becomes ‘-4’.</a:t>
+            </a:r>
+            <a:br>
+              <a:rPr lang="en-US" sz="1600" dirty="0">
+                <a:solidFill>
+                  <a:srgbClr val="EB6E19"/>
+                </a:solidFill>
+                <a:latin typeface="Consolas" panose="020B0609020204030204" pitchFamily="49" charset="0"/>
+              </a:rPr>
+            </a:br>
+            <a:r>
+              <a:rPr lang="en-US" sz="1600" dirty="0">
+                <a:solidFill>
+                  <a:srgbClr val="EB6E19"/>
+                </a:solidFill>
+                <a:latin typeface="Consolas" panose="020B0609020204030204" pitchFamily="49" charset="0"/>
+              </a:rPr>
+              <a:t>8) There are no more elements to scan, we return the top element from stack (which is the only element left in stack).</a:t>
             </a:r>
           </a:p>
         </p:txBody>
@@ -16861,7 +16952,7 @@
     </p:spTree>
     <p:extLst>
       <p:ext uri="{BB962C8B-B14F-4D97-AF65-F5344CB8AC3E}">
-        <p14:creationId xmlns:p14="http://schemas.microsoft.com/office/powerpoint/2010/main" val="3092846301"/>
+        <p14:creationId xmlns:p14="http://schemas.microsoft.com/office/powerpoint/2010/main" val="3921623338"/>
       </p:ext>
     </p:extLst>
   </p:cSld>
@@ -16926,6 +17017,278 @@
                 </a:solidFill>
                 <a:latin typeface="Gotham Bold" pitchFamily="50" charset="0"/>
               </a:rPr>
+              <a:t>Output Prediction / Coding Questions</a:t>
+            </a:r>
+          </a:p>
+        </p:txBody>
+      </p:sp>
+      <p:sp>
+        <p:nvSpPr>
+          <p:cNvPr id="5" name="Content Placeholder 1">
+            <a:extLst>
+              <a:ext uri="{FF2B5EF4-FFF2-40B4-BE49-F238E27FC236}">
+                <a16:creationId xmlns:a16="http://schemas.microsoft.com/office/drawing/2014/main" id="{9069B1C4-5084-4E0D-9FA0-9C8B794FA1FE}"/>
+              </a:ext>
+            </a:extLst>
+          </p:cNvPr>
+          <p:cNvSpPr txBox="1">
+            <a:spLocks/>
+          </p:cNvSpPr>
+          <p:nvPr/>
+        </p:nvSpPr>
+        <p:spPr>
+          <a:xfrm>
+            <a:off x="940881" y="1690688"/>
+            <a:ext cx="10978592" cy="5057971"/>
+          </a:xfrm>
+          <a:prstGeom prst="rect">
+            <a:avLst/>
+          </a:prstGeom>
+        </p:spPr>
+        <p:txBody>
+          <a:bodyPr vert="horz" lIns="91440" tIns="45720" rIns="91440" bIns="45720" rtlCol="0" anchor="t"/>
+          <a:lstStyle>
+            <a:defPPr>
+              <a:defRPr lang="en-US"/>
+            </a:defPPr>
+            <a:lvl1pPr marL="0" algn="l" defTabSz="914400" rtl="0" eaLnBrk="1" latinLnBrk="0" hangingPunct="1">
+              <a:defRPr sz="1200" kern="1200">
+                <a:solidFill>
+                  <a:schemeClr val="tx1">
+                    <a:tint val="75000"/>
+                  </a:schemeClr>
+                </a:solidFill>
+                <a:latin typeface="+mn-lt"/>
+                <a:ea typeface="+mn-ea"/>
+                <a:cs typeface="+mn-cs"/>
+              </a:defRPr>
+            </a:lvl1pPr>
+            <a:lvl2pPr marL="457200" algn="l" defTabSz="914400" rtl="0" eaLnBrk="1" latinLnBrk="0" hangingPunct="1">
+              <a:defRPr sz="1800" kern="1200">
+                <a:solidFill>
+                  <a:schemeClr val="tx1"/>
+                </a:solidFill>
+                <a:latin typeface="+mn-lt"/>
+                <a:ea typeface="+mn-ea"/>
+                <a:cs typeface="+mn-cs"/>
+              </a:defRPr>
+            </a:lvl2pPr>
+            <a:lvl3pPr marL="914400" algn="l" defTabSz="914400" rtl="0" eaLnBrk="1" latinLnBrk="0" hangingPunct="1">
+              <a:defRPr sz="1800" kern="1200">
+                <a:solidFill>
+                  <a:schemeClr val="tx1"/>
+                </a:solidFill>
+                <a:latin typeface="+mn-lt"/>
+                <a:ea typeface="+mn-ea"/>
+                <a:cs typeface="+mn-cs"/>
+              </a:defRPr>
+            </a:lvl3pPr>
+            <a:lvl4pPr marL="1371600" algn="l" defTabSz="914400" rtl="0" eaLnBrk="1" latinLnBrk="0" hangingPunct="1">
+              <a:defRPr sz="1800" kern="1200">
+                <a:solidFill>
+                  <a:schemeClr val="tx1"/>
+                </a:solidFill>
+                <a:latin typeface="+mn-lt"/>
+                <a:ea typeface="+mn-ea"/>
+                <a:cs typeface="+mn-cs"/>
+              </a:defRPr>
+            </a:lvl4pPr>
+            <a:lvl5pPr marL="1828800" algn="l" defTabSz="914400" rtl="0" eaLnBrk="1" latinLnBrk="0" hangingPunct="1">
+              <a:defRPr sz="1800" kern="1200">
+                <a:solidFill>
+                  <a:schemeClr val="tx1"/>
+                </a:solidFill>
+                <a:latin typeface="+mn-lt"/>
+                <a:ea typeface="+mn-ea"/>
+                <a:cs typeface="+mn-cs"/>
+              </a:defRPr>
+            </a:lvl5pPr>
+            <a:lvl6pPr marL="2286000" algn="l" defTabSz="914400" rtl="0" eaLnBrk="1" latinLnBrk="0" hangingPunct="1">
+              <a:defRPr sz="1800" kern="1200">
+                <a:solidFill>
+                  <a:schemeClr val="tx1"/>
+                </a:solidFill>
+                <a:latin typeface="+mn-lt"/>
+                <a:ea typeface="+mn-ea"/>
+                <a:cs typeface="+mn-cs"/>
+              </a:defRPr>
+            </a:lvl6pPr>
+            <a:lvl7pPr marL="2743200" algn="l" defTabSz="914400" rtl="0" eaLnBrk="1" latinLnBrk="0" hangingPunct="1">
+              <a:defRPr sz="1800" kern="1200">
+                <a:solidFill>
+                  <a:schemeClr val="tx1"/>
+                </a:solidFill>
+                <a:latin typeface="+mn-lt"/>
+                <a:ea typeface="+mn-ea"/>
+                <a:cs typeface="+mn-cs"/>
+              </a:defRPr>
+            </a:lvl7pPr>
+            <a:lvl8pPr marL="3200400" algn="l" defTabSz="914400" rtl="0" eaLnBrk="1" latinLnBrk="0" hangingPunct="1">
+              <a:defRPr sz="1800" kern="1200">
+                <a:solidFill>
+                  <a:schemeClr val="tx1"/>
+                </a:solidFill>
+                <a:latin typeface="+mn-lt"/>
+                <a:ea typeface="+mn-ea"/>
+                <a:cs typeface="+mn-cs"/>
+              </a:defRPr>
+            </a:lvl8pPr>
+            <a:lvl9pPr marL="3657600" algn="l" defTabSz="914400" rtl="0" eaLnBrk="1" latinLnBrk="0" hangingPunct="1">
+              <a:defRPr sz="1800" kern="1200">
+                <a:solidFill>
+                  <a:schemeClr val="tx1"/>
+                </a:solidFill>
+                <a:latin typeface="+mn-lt"/>
+                <a:ea typeface="+mn-ea"/>
+                <a:cs typeface="+mn-cs"/>
+              </a:defRPr>
+            </a:lvl9pPr>
+          </a:lstStyle>
+          <a:p>
+            <a:r>
+              <a:rPr lang="en-US" sz="1600" dirty="0">
+                <a:solidFill>
+                  <a:srgbClr val="0081E2"/>
+                </a:solidFill>
+                <a:latin typeface="Consolas" panose="020B0609020204030204" pitchFamily="49" charset="0"/>
+                <a:hlinkClick r:id="rId3">
+                  <a:extLst>
+                    <a:ext uri="{A12FA001-AC4F-418D-AE19-62706E023703}">
+                      <ahyp:hlinkClr xmlns:ahyp="http://schemas.microsoft.com/office/drawing/2018/hyperlinkcolor" val="tx"/>
+                    </a:ext>
+                  </a:extLst>
+                </a:hlinkClick>
+              </a:rPr>
+              <a:t>https://onlinegdb.com/BJ4hyD7vP</a:t>
+            </a:r>
+            <a:endParaRPr lang="en-US" sz="1600" dirty="0">
+              <a:solidFill>
+                <a:srgbClr val="0081E2"/>
+              </a:solidFill>
+              <a:latin typeface="Consolas" panose="020B0609020204030204" pitchFamily="49" charset="0"/>
+            </a:endParaRPr>
+          </a:p>
+          <a:p>
+            <a:r>
+              <a:rPr lang="en-US" sz="1600" dirty="0">
+                <a:solidFill>
+                  <a:srgbClr val="0081E2"/>
+                </a:solidFill>
+                <a:latin typeface="Consolas" panose="020B0609020204030204" pitchFamily="49" charset="0"/>
+                <a:hlinkClick r:id="rId4">
+                  <a:extLst>
+                    <a:ext uri="{A12FA001-AC4F-418D-AE19-62706E023703}">
+                      <ahyp:hlinkClr xmlns:ahyp="http://schemas.microsoft.com/office/drawing/2018/hyperlinkcolor" val="tx"/>
+                    </a:ext>
+                  </a:extLst>
+                </a:hlinkClick>
+              </a:rPr>
+              <a:t>https://onlinegdb.com/BJ6gewQDP</a:t>
+            </a:r>
+            <a:endParaRPr lang="en-US" sz="1600" dirty="0">
+              <a:solidFill>
+                <a:srgbClr val="0081E2"/>
+              </a:solidFill>
+              <a:latin typeface="Consolas" panose="020B0609020204030204" pitchFamily="49" charset="0"/>
+            </a:endParaRPr>
+          </a:p>
+          <a:p>
+            <a:r>
+              <a:rPr lang="en-US" sz="1600" dirty="0">
+                <a:solidFill>
+                  <a:srgbClr val="0081E2"/>
+                </a:solidFill>
+                <a:latin typeface="Consolas" panose="020B0609020204030204" pitchFamily="49" charset="0"/>
+                <a:hlinkClick r:id="rId5">
+                  <a:extLst>
+                    <a:ext uri="{A12FA001-AC4F-418D-AE19-62706E023703}">
+                      <ahyp:hlinkClr xmlns:ahyp="http://schemas.microsoft.com/office/drawing/2018/hyperlinkcolor" val="tx"/>
+                    </a:ext>
+                  </a:extLst>
+                </a:hlinkClick>
+              </a:rPr>
+              <a:t>https://onlinegdb.com/OefiHIntV</a:t>
+            </a:r>
+            <a:r>
+              <a:rPr lang="en-US" sz="1600" dirty="0">
+                <a:solidFill>
+                  <a:srgbClr val="0081E2"/>
+                </a:solidFill>
+                <a:latin typeface="Consolas" panose="020B0609020204030204" pitchFamily="49" charset="0"/>
+              </a:rPr>
+              <a:t>  </a:t>
+            </a:r>
+          </a:p>
+        </p:txBody>
+      </p:sp>
+    </p:spTree>
+    <p:extLst>
+      <p:ext uri="{BB962C8B-B14F-4D97-AF65-F5344CB8AC3E}">
+        <p14:creationId xmlns:p14="http://schemas.microsoft.com/office/powerpoint/2010/main" val="3092846301"/>
+      </p:ext>
+    </p:extLst>
+  </p:cSld>
+  <p:clrMapOvr>
+    <a:masterClrMapping/>
+  </p:clrMapOvr>
+</p:sld>
+</file>
+
+<file path=ppt/slides/slide26.xml><?xml version="1.0" encoding="utf-8"?>
+<p:sld xmlns:a="http://schemas.openxmlformats.org/drawingml/2006/main" xmlns:r="http://schemas.openxmlformats.org/officeDocument/2006/relationships" xmlns:p="http://schemas.openxmlformats.org/presentationml/2006/main">
+  <p:cSld>
+    <p:bg>
+      <p:bgPr>
+        <a:solidFill>
+          <a:schemeClr val="tx1"/>
+        </a:solidFill>
+        <a:effectLst/>
+      </p:bgPr>
+    </p:bg>
+    <p:spTree>
+      <p:nvGrpSpPr>
+        <p:cNvPr id="1" name=""/>
+        <p:cNvGrpSpPr/>
+        <p:nvPr/>
+      </p:nvGrpSpPr>
+      <p:grpSpPr>
+        <a:xfrm>
+          <a:off x="0" y="0"/>
+          <a:ext cx="0" cy="0"/>
+          <a:chOff x="0" y="0"/>
+          <a:chExt cx="0" cy="0"/>
+        </a:xfrm>
+      </p:grpSpPr>
+      <p:sp>
+        <p:nvSpPr>
+          <p:cNvPr id="2" name="Title 1">
+            <a:extLst>
+              <a:ext uri="{FF2B5EF4-FFF2-40B4-BE49-F238E27FC236}">
+                <a16:creationId xmlns:a16="http://schemas.microsoft.com/office/drawing/2014/main" id="{FA98DF2D-4C21-45B7-8CEE-41E2C22A3166}"/>
+              </a:ext>
+            </a:extLst>
+          </p:cNvPr>
+          <p:cNvSpPr>
+            <a:spLocks noGrp="1"/>
+          </p:cNvSpPr>
+          <p:nvPr>
+            <p:ph type="title"/>
+          </p:nvPr>
+        </p:nvSpPr>
+        <p:spPr/>
+        <p:txBody>
+          <a:bodyPr>
+            <a:normAutofit/>
+          </a:bodyPr>
+          <a:lstStyle/>
+          <a:p>
+            <a:r>
+              <a:rPr lang="en-US" sz="3600" dirty="0">
+                <a:solidFill>
+                  <a:schemeClr val="bg1"/>
+                </a:solidFill>
+                <a:latin typeface="Gotham Bold" pitchFamily="50" charset="0"/>
+              </a:rPr>
               <a:t>Mini Review – Coding questions</a:t>
             </a:r>
           </a:p>
@@ -17175,7 +17538,7 @@
 </p:sld>
 </file>
 
-<file path=ppt/slides/slide26.xml><?xml version="1.0" encoding="utf-8"?>
+<file path=ppt/slides/slide27.xml><?xml version="1.0" encoding="utf-8"?>
 <p:sld xmlns:a="http://schemas.openxmlformats.org/drawingml/2006/main" xmlns:r="http://schemas.openxmlformats.org/officeDocument/2006/relationships" xmlns:p="http://schemas.openxmlformats.org/presentationml/2006/main">
   <p:cSld>
     <p:bg>
@@ -17409,7 +17772,7 @@
 </p:sld>
 </file>
 
-<file path=ppt/slides/slide27.xml><?xml version="1.0" encoding="utf-8"?>
+<file path=ppt/slides/slide28.xml><?xml version="1.0" encoding="utf-8"?>
 <p:sld xmlns:a="http://schemas.openxmlformats.org/drawingml/2006/main" xmlns:r="http://schemas.openxmlformats.org/officeDocument/2006/relationships" xmlns:p="http://schemas.openxmlformats.org/presentationml/2006/main">
   <p:cSld>
     <p:bg>
@@ -18368,7 +18731,7 @@
 </p:sld>
 </file>
 
-<file path=ppt/slides/slide28.xml><?xml version="1.0" encoding="utf-8"?>
+<file path=ppt/slides/slide29.xml><?xml version="1.0" encoding="utf-8"?>
 <p:sld xmlns:a="http://schemas.openxmlformats.org/drawingml/2006/main" xmlns:r="http://schemas.openxmlformats.org/officeDocument/2006/relationships" xmlns:p="http://schemas.openxmlformats.org/presentationml/2006/main">
   <p:cSld>
     <p:bg>
@@ -19250,176 +19613,6 @@
     <p:extLst>
       <p:ext uri="{BB962C8B-B14F-4D97-AF65-F5344CB8AC3E}">
         <p14:creationId xmlns:p14="http://schemas.microsoft.com/office/powerpoint/2010/main" val="3655248238"/>
-      </p:ext>
-    </p:extLst>
-  </p:cSld>
-  <p:clrMapOvr>
-    <a:masterClrMapping/>
-  </p:clrMapOvr>
-</p:sld>
-</file>
-
-<file path=ppt/slides/slide29.xml><?xml version="1.0" encoding="utf-8"?>
-<p:sld xmlns:a="http://schemas.openxmlformats.org/drawingml/2006/main" xmlns:r="http://schemas.openxmlformats.org/officeDocument/2006/relationships" xmlns:p="http://schemas.openxmlformats.org/presentationml/2006/main" show="0">
-  <p:cSld>
-    <p:bg>
-      <p:bgPr>
-        <a:solidFill>
-          <a:schemeClr val="tx1"/>
-        </a:solidFill>
-        <a:effectLst/>
-      </p:bgPr>
-    </p:bg>
-    <p:spTree>
-      <p:nvGrpSpPr>
-        <p:cNvPr id="1" name=""/>
-        <p:cNvGrpSpPr/>
-        <p:nvPr/>
-      </p:nvGrpSpPr>
-      <p:grpSpPr>
-        <a:xfrm>
-          <a:off x="0" y="0"/>
-          <a:ext cx="0" cy="0"/>
-          <a:chOff x="0" y="0"/>
-          <a:chExt cx="0" cy="0"/>
-        </a:xfrm>
-      </p:grpSpPr>
-      <p:sp>
-        <p:nvSpPr>
-          <p:cNvPr id="2" name="Title 1">
-            <a:extLst>
-              <a:ext uri="{FF2B5EF4-FFF2-40B4-BE49-F238E27FC236}">
-                <a16:creationId xmlns:a16="http://schemas.microsoft.com/office/drawing/2014/main" id="{FA98DF2D-4C21-45B7-8CEE-41E2C22A3166}"/>
-              </a:ext>
-            </a:extLst>
-          </p:cNvPr>
-          <p:cNvSpPr>
-            <a:spLocks noGrp="1"/>
-          </p:cNvSpPr>
-          <p:nvPr>
-            <p:ph type="title"/>
-          </p:nvPr>
-        </p:nvSpPr>
-        <p:spPr/>
-        <p:txBody>
-          <a:bodyPr>
-            <a:normAutofit/>
-          </a:bodyPr>
-          <a:lstStyle/>
-          <a:p>
-            <a:r>
-              <a:rPr lang="en-US" sz="3600" dirty="0">
-                <a:solidFill>
-                  <a:schemeClr val="bg1"/>
-                </a:solidFill>
-                <a:latin typeface="Gotham Bold" pitchFamily="50" charset="0"/>
-              </a:rPr>
-              <a:t>Mini Review – Sorting</a:t>
-            </a:r>
-          </a:p>
-        </p:txBody>
-      </p:sp>
-      <p:sp>
-        <p:nvSpPr>
-          <p:cNvPr id="6" name="TextBox 5">
-            <a:extLst>
-              <a:ext uri="{FF2B5EF4-FFF2-40B4-BE49-F238E27FC236}">
-                <a16:creationId xmlns:a16="http://schemas.microsoft.com/office/drawing/2014/main" id="{6910D817-7706-4B40-61E0-933842B0CC61}"/>
-              </a:ext>
-            </a:extLst>
-          </p:cNvPr>
-          <p:cNvSpPr txBox="1"/>
-          <p:nvPr/>
-        </p:nvSpPr>
-        <p:spPr>
-          <a:xfrm>
-            <a:off x="1103126" y="2326068"/>
-            <a:ext cx="9252985" cy="2585323"/>
-          </a:xfrm>
-          <a:prstGeom prst="rect">
-            <a:avLst/>
-          </a:prstGeom>
-          <a:noFill/>
-        </p:spPr>
-        <p:txBody>
-          <a:bodyPr wrap="square">
-            <a:spAutoFit/>
-          </a:bodyPr>
-          <a:lstStyle/>
-          <a:p>
-            <a:r>
-              <a:rPr lang="en-US" dirty="0">
-                <a:solidFill>
-                  <a:srgbClr val="EB6E19"/>
-                </a:solidFill>
-              </a:rPr>
-              <a:t>Recognize the following techniques with the most appropriate algorithm.</a:t>
-            </a:r>
-          </a:p>
-          <a:p>
-            <a:endParaRPr lang="en-US" dirty="0">
-              <a:solidFill>
-                <a:srgbClr val="EB6E19"/>
-              </a:solidFill>
-            </a:endParaRPr>
-          </a:p>
-          <a:p>
-            <a:r>
-              <a:rPr lang="en-US" dirty="0">
-                <a:solidFill>
-                  <a:schemeClr val="bg1"/>
-                </a:solidFill>
-              </a:rPr>
-              <a:t>Finds smallest element and puts in lowest index, then puts second smallest in the second index, and so on</a:t>
-            </a:r>
-          </a:p>
-          <a:p>
-            <a:endParaRPr lang="en-US" dirty="0">
-              <a:solidFill>
-                <a:schemeClr val="bg1"/>
-              </a:solidFill>
-            </a:endParaRPr>
-          </a:p>
-          <a:p>
-            <a:r>
-              <a:rPr lang="en-US" dirty="0">
-                <a:solidFill>
-                  <a:schemeClr val="bg1"/>
-                </a:solidFill>
-              </a:rPr>
-              <a:t>Swaps neighboring items</a:t>
-            </a:r>
-          </a:p>
-          <a:p>
-            <a:endParaRPr lang="en-US" dirty="0">
-              <a:solidFill>
-                <a:schemeClr val="bg1"/>
-              </a:solidFill>
-            </a:endParaRPr>
-          </a:p>
-          <a:p>
-            <a:r>
-              <a:rPr lang="en-US" dirty="0">
-                <a:solidFill>
-                  <a:schemeClr val="bg1"/>
-                </a:solidFill>
-              </a:rPr>
-              <a:t>Rearranges elements at a gap and reduces gaps across passes until it converges</a:t>
-            </a:r>
-          </a:p>
-          <a:p>
-            <a:endParaRPr lang="en-US" dirty="0">
-              <a:solidFill>
-                <a:srgbClr val="EB6E19"/>
-              </a:solidFill>
-            </a:endParaRPr>
-          </a:p>
-        </p:txBody>
-      </p:sp>
-    </p:spTree>
-    <p:extLst>
-      <p:ext uri="{BB962C8B-B14F-4D97-AF65-F5344CB8AC3E}">
-        <p14:creationId xmlns:p14="http://schemas.microsoft.com/office/powerpoint/2010/main" val="4067574677"/>
       </p:ext>
     </p:extLst>
   </p:cSld>
@@ -19796,6 +19989,176 @@
                   <a:schemeClr val="bg1"/>
                 </a:solidFill>
               </a:rPr>
+              <a:t>Finds smallest element and puts in lowest index, then puts second smallest in the second index, and so on</a:t>
+            </a:r>
+          </a:p>
+          <a:p>
+            <a:endParaRPr lang="en-US" dirty="0">
+              <a:solidFill>
+                <a:schemeClr val="bg1"/>
+              </a:solidFill>
+            </a:endParaRPr>
+          </a:p>
+          <a:p>
+            <a:r>
+              <a:rPr lang="en-US" dirty="0">
+                <a:solidFill>
+                  <a:schemeClr val="bg1"/>
+                </a:solidFill>
+              </a:rPr>
+              <a:t>Swaps neighboring items</a:t>
+            </a:r>
+          </a:p>
+          <a:p>
+            <a:endParaRPr lang="en-US" dirty="0">
+              <a:solidFill>
+                <a:schemeClr val="bg1"/>
+              </a:solidFill>
+            </a:endParaRPr>
+          </a:p>
+          <a:p>
+            <a:r>
+              <a:rPr lang="en-US" dirty="0">
+                <a:solidFill>
+                  <a:schemeClr val="bg1"/>
+                </a:solidFill>
+              </a:rPr>
+              <a:t>Rearranges elements at a gap and reduces gaps across passes until it converges</a:t>
+            </a:r>
+          </a:p>
+          <a:p>
+            <a:endParaRPr lang="en-US" dirty="0">
+              <a:solidFill>
+                <a:srgbClr val="EB6E19"/>
+              </a:solidFill>
+            </a:endParaRPr>
+          </a:p>
+        </p:txBody>
+      </p:sp>
+    </p:spTree>
+    <p:extLst>
+      <p:ext uri="{BB962C8B-B14F-4D97-AF65-F5344CB8AC3E}">
+        <p14:creationId xmlns:p14="http://schemas.microsoft.com/office/powerpoint/2010/main" val="4067574677"/>
+      </p:ext>
+    </p:extLst>
+  </p:cSld>
+  <p:clrMapOvr>
+    <a:masterClrMapping/>
+  </p:clrMapOvr>
+</p:sld>
+</file>
+
+<file path=ppt/slides/slide31.xml><?xml version="1.0" encoding="utf-8"?>
+<p:sld xmlns:a="http://schemas.openxmlformats.org/drawingml/2006/main" xmlns:r="http://schemas.openxmlformats.org/officeDocument/2006/relationships" xmlns:p="http://schemas.openxmlformats.org/presentationml/2006/main" show="0">
+  <p:cSld>
+    <p:bg>
+      <p:bgPr>
+        <a:solidFill>
+          <a:schemeClr val="tx1"/>
+        </a:solidFill>
+        <a:effectLst/>
+      </p:bgPr>
+    </p:bg>
+    <p:spTree>
+      <p:nvGrpSpPr>
+        <p:cNvPr id="1" name=""/>
+        <p:cNvGrpSpPr/>
+        <p:nvPr/>
+      </p:nvGrpSpPr>
+      <p:grpSpPr>
+        <a:xfrm>
+          <a:off x="0" y="0"/>
+          <a:ext cx="0" cy="0"/>
+          <a:chOff x="0" y="0"/>
+          <a:chExt cx="0" cy="0"/>
+        </a:xfrm>
+      </p:grpSpPr>
+      <p:sp>
+        <p:nvSpPr>
+          <p:cNvPr id="2" name="Title 1">
+            <a:extLst>
+              <a:ext uri="{FF2B5EF4-FFF2-40B4-BE49-F238E27FC236}">
+                <a16:creationId xmlns:a16="http://schemas.microsoft.com/office/drawing/2014/main" id="{FA98DF2D-4C21-45B7-8CEE-41E2C22A3166}"/>
+              </a:ext>
+            </a:extLst>
+          </p:cNvPr>
+          <p:cNvSpPr>
+            <a:spLocks noGrp="1"/>
+          </p:cNvSpPr>
+          <p:nvPr>
+            <p:ph type="title"/>
+          </p:nvPr>
+        </p:nvSpPr>
+        <p:spPr/>
+        <p:txBody>
+          <a:bodyPr>
+            <a:normAutofit/>
+          </a:bodyPr>
+          <a:lstStyle/>
+          <a:p>
+            <a:r>
+              <a:rPr lang="en-US" sz="3600" dirty="0">
+                <a:solidFill>
+                  <a:schemeClr val="bg1"/>
+                </a:solidFill>
+                <a:latin typeface="Gotham Bold" pitchFamily="50" charset="0"/>
+              </a:rPr>
+              <a:t>Mini Review – Sorting</a:t>
+            </a:r>
+          </a:p>
+        </p:txBody>
+      </p:sp>
+      <p:sp>
+        <p:nvSpPr>
+          <p:cNvPr id="6" name="TextBox 5">
+            <a:extLst>
+              <a:ext uri="{FF2B5EF4-FFF2-40B4-BE49-F238E27FC236}">
+                <a16:creationId xmlns:a16="http://schemas.microsoft.com/office/drawing/2014/main" id="{6910D817-7706-4B40-61E0-933842B0CC61}"/>
+              </a:ext>
+            </a:extLst>
+          </p:cNvPr>
+          <p:cNvSpPr txBox="1"/>
+          <p:nvPr/>
+        </p:nvSpPr>
+        <p:spPr>
+          <a:xfrm>
+            <a:off x="1103126" y="2326068"/>
+            <a:ext cx="9252985" cy="2585323"/>
+          </a:xfrm>
+          <a:prstGeom prst="rect">
+            <a:avLst/>
+          </a:prstGeom>
+          <a:noFill/>
+        </p:spPr>
+        <p:txBody>
+          <a:bodyPr wrap="square">
+            <a:spAutoFit/>
+          </a:bodyPr>
+          <a:lstStyle/>
+          <a:p>
+            <a:r>
+              <a:rPr lang="en-US" dirty="0">
+                <a:solidFill>
+                  <a:srgbClr val="EB6E19"/>
+                </a:solidFill>
+              </a:rPr>
+              <a:t>Recognize the following techniques with the most appropriate algorithm.</a:t>
+            </a:r>
+          </a:p>
+          <a:p>
+            <a:endParaRPr lang="en-US" dirty="0">
+              <a:solidFill>
+                <a:srgbClr val="EB6E19"/>
+              </a:solidFill>
+            </a:endParaRPr>
+          </a:p>
+          <a:p>
+            <a:r>
+              <a:rPr lang="en-US" dirty="0">
+                <a:solidFill>
+                  <a:schemeClr val="bg1"/>
+                </a:solidFill>
+              </a:rPr>
               <a:t>Finds smallest element and puts in lowest index, then puts second smallest in the second index, and so on: </a:t>
             </a:r>
             <a:r>
@@ -19884,7 +20247,7 @@
 </p:sld>
 </file>
 
-<file path=ppt/slides/slide31.xml><?xml version="1.0" encoding="utf-8"?>
+<file path=ppt/slides/slide32.xml><?xml version="1.0" encoding="utf-8"?>
 <p:sld xmlns:a="http://schemas.openxmlformats.org/drawingml/2006/main" xmlns:r="http://schemas.openxmlformats.org/officeDocument/2006/relationships" xmlns:p="http://schemas.openxmlformats.org/presentationml/2006/main" show="0">
   <p:cSld>
     <p:bg>
@@ -21073,7 +21436,7 @@
 </p:sld>
 </file>
 
-<file path=ppt/slides/slide32.xml><?xml version="1.0" encoding="utf-8"?>
+<file path=ppt/slides/slide33.xml><?xml version="1.0" encoding="utf-8"?>
 <p:sld xmlns:a="http://schemas.openxmlformats.org/drawingml/2006/main" xmlns:r="http://schemas.openxmlformats.org/officeDocument/2006/relationships" xmlns:p="http://schemas.openxmlformats.org/presentationml/2006/main" show="0">
   <p:cSld>
     <p:bg>
@@ -22268,7 +22631,7 @@
 </p:sld>
 </file>
 
-<file path=ppt/slides/slide33.xml><?xml version="1.0" encoding="utf-8"?>
+<file path=ppt/slides/slide34.xml><?xml version="1.0" encoding="utf-8"?>
 <p:sld xmlns:a="http://schemas.openxmlformats.org/drawingml/2006/main" xmlns:r="http://schemas.openxmlformats.org/officeDocument/2006/relationships" xmlns:p="http://schemas.openxmlformats.org/presentationml/2006/main">
   <p:cSld>
     <p:bg>
@@ -22548,14 +22911,109 @@
                   <a:noFill/>
                 </a:ln>
                 <a:solidFill>
-                  <a:srgbClr val="EB6E19"/>
+                  <a:srgbClr val="00B050"/>
                 </a:solidFill>
                 <a:effectLst/>
                 <a:uLnTx/>
                 <a:uFillTx/>
                 <a:latin typeface="Consolas" panose="020B0609020204030204" pitchFamily="49" charset="0"/>
               </a:rPr>
-              <a:t>The exam will be in class via Honorlock on Thursday, October 2, 1:55-3:50 pm. </a:t>
+              <a:t>For campus students (excluding students who need accommodations): </a:t>
+            </a:r>
+            <a:r>
+              <a:rPr kumimoji="0" lang="en-US" sz="1600" b="0" i="0" u="none" strike="noStrike" kern="1200" cap="none" spc="0" normalizeH="0" baseline="0" noProof="0" dirty="0">
+                <a:ln>
+                  <a:noFill/>
+                </a:ln>
+                <a:solidFill>
+                  <a:srgbClr val="EB6E19"/>
+                </a:solidFill>
+                <a:effectLst/>
+                <a:uLnTx/>
+                <a:uFillTx/>
+                <a:latin typeface="Consolas" panose="020B0609020204030204" pitchFamily="49" charset="0"/>
+              </a:rPr>
+              <a:t>Exam 1 will be on Feb 26 (Thursday) at 8:20 pm to 10:10 pm on campus in-person. The location of the exam is dependent on your last name.</a:t>
+            </a:r>
+          </a:p>
+          <a:p>
+            <a:pPr marL="742950" lvl="1" indent="-285750">
+              <a:lnSpc>
+                <a:spcPct val="150000"/>
+              </a:lnSpc>
+              <a:buFont typeface="Wingdings" panose="05000000000000000000" pitchFamily="2" charset="2"/>
+              <a:buChar char="§"/>
+              <a:defRPr/>
+            </a:pPr>
+            <a:r>
+              <a:rPr kumimoji="0" lang="en-US" sz="1600" b="0" i="0" u="none" strike="noStrike" kern="1200" cap="none" spc="0" normalizeH="0" baseline="0" noProof="0" dirty="0">
+                <a:ln>
+                  <a:noFill/>
+                </a:ln>
+                <a:solidFill>
+                  <a:srgbClr val="00B050"/>
+                </a:solidFill>
+                <a:effectLst/>
+                <a:uLnTx/>
+                <a:uFillTx/>
+                <a:latin typeface="Consolas" panose="020B0609020204030204" pitchFamily="49" charset="0"/>
+              </a:rPr>
+              <a:t>For campus students who need accommodations as per DRC: </a:t>
+            </a:r>
+            <a:r>
+              <a:rPr kumimoji="0" lang="en-US" sz="1600" b="0" i="0" u="none" strike="noStrike" kern="1200" cap="none" spc="0" normalizeH="0" baseline="0" noProof="0" dirty="0">
+                <a:ln>
+                  <a:noFill/>
+                </a:ln>
+                <a:solidFill>
+                  <a:srgbClr val="EB6E19"/>
+                </a:solidFill>
+                <a:effectLst/>
+                <a:uLnTx/>
+                <a:uFillTx/>
+                <a:latin typeface="Consolas" panose="020B0609020204030204" pitchFamily="49" charset="0"/>
+              </a:rPr>
+              <a:t>Exam 1 will be on Feb 26 (Thursday). You can take the exam on Honorlock anytime between 6 pm to 11:59 pm at your home.</a:t>
+            </a:r>
+          </a:p>
+          <a:p>
+            <a:pPr marL="742950" lvl="1" indent="-285750">
+              <a:lnSpc>
+                <a:spcPct val="150000"/>
+              </a:lnSpc>
+              <a:buFont typeface="Wingdings" panose="05000000000000000000" pitchFamily="2" charset="2"/>
+              <a:buChar char="§"/>
+              <a:defRPr/>
+            </a:pPr>
+            <a:r>
+              <a:rPr kumimoji="0" lang="en-US" sz="1600" b="0" i="0" u="none" strike="noStrike" kern="1200" cap="none" spc="0" normalizeH="0" baseline="0" noProof="0" dirty="0">
+                <a:ln>
+                  <a:noFill/>
+                </a:ln>
+                <a:solidFill>
+                  <a:srgbClr val="00B050"/>
+                </a:solidFill>
+                <a:effectLst/>
+                <a:uLnTx/>
+                <a:uFillTx/>
+                <a:latin typeface="Consolas" panose="020B0609020204030204" pitchFamily="49" charset="0"/>
+              </a:rPr>
+              <a:t>For UFOL/UDER students: </a:t>
+            </a:r>
+            <a:r>
+              <a:rPr kumimoji="0" lang="en-US" sz="1600" b="0" i="0" u="none" strike="noStrike" kern="1200" cap="none" spc="0" normalizeH="0" baseline="0" noProof="0" dirty="0">
+                <a:ln>
+                  <a:noFill/>
+                </a:ln>
+                <a:solidFill>
+                  <a:srgbClr val="EB6E19"/>
+                </a:solidFill>
+                <a:effectLst/>
+                <a:uLnTx/>
+                <a:uFillTx/>
+                <a:latin typeface="Consolas" panose="020B0609020204030204" pitchFamily="49" charset="0"/>
+              </a:rPr>
+              <a:t>Exam 1 will available between 8:20 pm on Feb 26 (Thursday) to midnight on Feb 28 (Saturday). You can take the exam on Honorlock anytime at your home.</a:t>
             </a:r>
           </a:p>
           <a:p>
@@ -22659,7 +23117,7 @@
                 <a:uFillTx/>
                 <a:latin typeface="Consolas" panose="020B0609020204030204" pitchFamily="49" charset="0"/>
               </a:rPr>
-              <a:t>6 double sided blank sheets of scratch paper (letter size/A4 page).</a:t>
+              <a:t>4 double sided blank sheets of scratch paper (letter size/A4 page).</a:t>
             </a:r>
           </a:p>
         </p:txBody>
@@ -22690,7 +23148,13 @@
     </p:bg>
     <p:spTree>
       <p:nvGrpSpPr>
-        <p:cNvPr id="1" name=""/>
+        <p:cNvPr id="1" name="">
+          <a:extLst>
+            <a:ext uri="{FF2B5EF4-FFF2-40B4-BE49-F238E27FC236}">
+              <a16:creationId xmlns:a16="http://schemas.microsoft.com/office/drawing/2014/main" id="{475CB625-007D-DED2-4640-E7409BD83A52}"/>
+            </a:ext>
+          </a:extLst>
+        </p:cNvPr>
         <p:cNvGrpSpPr/>
         <p:nvPr/>
       </p:nvGrpSpPr>
@@ -22707,7 +23171,7 @@
           <p:cNvPr id="2" name="Title 1">
             <a:extLst>
               <a:ext uri="{FF2B5EF4-FFF2-40B4-BE49-F238E27FC236}">
-                <a16:creationId xmlns:a16="http://schemas.microsoft.com/office/drawing/2014/main" id="{FA98DF2D-4C21-45B7-8CEE-41E2C22A3166}"/>
+                <a16:creationId xmlns:a16="http://schemas.microsoft.com/office/drawing/2014/main" id="{9C549461-62E7-7462-ED21-EB75ECB9EE97}"/>
               </a:ext>
             </a:extLst>
           </p:cNvPr>
@@ -22721,67 +23185,110 @@
         <p:spPr/>
         <p:txBody>
           <a:bodyPr>
-            <a:normAutofit/>
+            <a:normAutofit fontScale="90000"/>
           </a:bodyPr>
           <a:lstStyle/>
           <a:p>
-            <a:r>
-              <a:rPr lang="en-US" sz="3600" dirty="0">
+            <a:br>
+              <a:rPr lang="en-US" dirty="0">
                 <a:solidFill>
                   <a:schemeClr val="bg1"/>
                 </a:solidFill>
                 <a:latin typeface="Gotham Bold" pitchFamily="50" charset="0"/>
               </a:rPr>
-              <a:t>Exam 1 Topics and Expectations</a:t>
-            </a:r>
-          </a:p>
-        </p:txBody>
-      </p:sp>
-      <p:sp>
-        <p:nvSpPr>
-          <p:cNvPr id="5" name="TextBox 4">
+            </a:br>
+            <a:br>
+              <a:rPr lang="en-US" dirty="0">
+                <a:solidFill>
+                  <a:schemeClr val="bg1"/>
+                </a:solidFill>
+                <a:latin typeface="Gotham Bold" pitchFamily="50" charset="0"/>
+              </a:rPr>
+            </a:br>
+            <a:br>
+              <a:rPr lang="en-US" dirty="0">
+                <a:solidFill>
+                  <a:schemeClr val="bg1"/>
+                </a:solidFill>
+                <a:latin typeface="Gotham Bold" pitchFamily="50" charset="0"/>
+              </a:rPr>
+            </a:br>
+            <a:r>
+              <a:rPr lang="en-US" dirty="0">
+                <a:solidFill>
+                  <a:schemeClr val="bg1"/>
+                </a:solidFill>
+                <a:latin typeface="Gotham Bold" pitchFamily="50" charset="0"/>
+              </a:rPr>
+              <a:t>Exam 1 Logistics</a:t>
+            </a:r>
+            <a:br>
+              <a:rPr lang="en-US" dirty="0">
+                <a:solidFill>
+                  <a:schemeClr val="bg1"/>
+                </a:solidFill>
+                <a:latin typeface="Gotham Bold" pitchFamily="50" charset="0"/>
+              </a:rPr>
+            </a:br>
+            <a:br>
+              <a:rPr lang="en-US" dirty="0">
+                <a:solidFill>
+                  <a:schemeClr val="bg1"/>
+                </a:solidFill>
+                <a:latin typeface="Gotham Bold" pitchFamily="50" charset="0"/>
+              </a:rPr>
+            </a:br>
+            <a:br>
+              <a:rPr lang="en-US" dirty="0">
+                <a:solidFill>
+                  <a:schemeClr val="bg1"/>
+                </a:solidFill>
+                <a:latin typeface="Gotham Bold" pitchFamily="50" charset="0"/>
+              </a:rPr>
+            </a:br>
+            <a:endParaRPr lang="en-US" dirty="0">
+              <a:solidFill>
+                <a:schemeClr val="bg1"/>
+              </a:solidFill>
+              <a:latin typeface="Gotham Bold" pitchFamily="50" charset="0"/>
+            </a:endParaRPr>
+          </a:p>
+        </p:txBody>
+      </p:sp>
+      <p:pic>
+        <p:nvPicPr>
+          <p:cNvPr id="7" name="Picture 6">
             <a:extLst>
               <a:ext uri="{FF2B5EF4-FFF2-40B4-BE49-F238E27FC236}">
-                <a16:creationId xmlns:a16="http://schemas.microsoft.com/office/drawing/2014/main" id="{B9F3F2B3-9659-875A-AE5F-17F90640C5E8}"/>
+                <a16:creationId xmlns:a16="http://schemas.microsoft.com/office/drawing/2014/main" id="{2DC7121D-0AB6-F308-1F5A-7CB6076A5177}"/>
               </a:ext>
             </a:extLst>
           </p:cNvPr>
-          <p:cNvSpPr txBox="1"/>
+          <p:cNvPicPr>
+            <a:picLocks noChangeAspect="1"/>
+          </p:cNvPicPr>
           <p:nvPr/>
-        </p:nvSpPr>
+        </p:nvPicPr>
+        <p:blipFill>
+          <a:blip r:embed="rId3"/>
+          <a:stretch>
+            <a:fillRect/>
+          </a:stretch>
+        </p:blipFill>
         <p:spPr>
           <a:xfrm>
-            <a:off x="1083527" y="1823445"/>
-            <a:ext cx="10870580" cy="369332"/>
+            <a:off x="2177185" y="2080027"/>
+            <a:ext cx="6911939" cy="2110923"/>
           </a:xfrm>
           <a:prstGeom prst="rect">
             <a:avLst/>
           </a:prstGeom>
-          <a:noFill/>
         </p:spPr>
-        <p:txBody>
-          <a:bodyPr wrap="square">
-            <a:spAutoFit/>
-          </a:bodyPr>
-          <a:lstStyle/>
-          <a:p>
-            <a:r>
-              <a:rPr lang="en-US" dirty="0">
-                <a:hlinkClick r:id="rId3"/>
-              </a:rPr>
-              <a:t>https://docs.google.com/document/d/1XAUGHQE4JWmOsDkkbfTnLFoVi_QXySxC-J4XZnK4VTQ/edit?tab=t.0</a:t>
-            </a:r>
-            <a:r>
-              <a:rPr lang="en-US" dirty="0"/>
-              <a:t> </a:t>
-            </a:r>
-          </a:p>
-        </p:txBody>
-      </p:sp>
+      </p:pic>
     </p:spTree>
     <p:extLst>
       <p:ext uri="{BB962C8B-B14F-4D97-AF65-F5344CB8AC3E}">
-        <p14:creationId xmlns:p14="http://schemas.microsoft.com/office/powerpoint/2010/main" val="1488638803"/>
+        <p14:creationId xmlns:p14="http://schemas.microsoft.com/office/powerpoint/2010/main" val="8960134"/>
       </p:ext>
     </p:extLst>
   </p:cSld>
@@ -22846,17 +23353,17 @@
                 </a:solidFill>
                 <a:latin typeface="Gotham Bold" pitchFamily="50" charset="0"/>
               </a:rPr>
-              <a:t>Mini Review – Complexity</a:t>
-            </a:r>
-          </a:p>
-        </p:txBody>
-      </p:sp>
-      <p:sp>
-        <p:nvSpPr>
-          <p:cNvPr id="4" name="TextBox 3">
+              <a:t>Exam 1 Topics and Expectations</a:t>
+            </a:r>
+          </a:p>
+        </p:txBody>
+      </p:sp>
+      <p:sp>
+        <p:nvSpPr>
+          <p:cNvPr id="5" name="TextBox 4">
             <a:extLst>
               <a:ext uri="{FF2B5EF4-FFF2-40B4-BE49-F238E27FC236}">
-                <a16:creationId xmlns:a16="http://schemas.microsoft.com/office/drawing/2014/main" id="{A70E6009-18FB-490F-970D-3C9B83737A5E}"/>
+                <a16:creationId xmlns:a16="http://schemas.microsoft.com/office/drawing/2014/main" id="{B9F3F2B3-9659-875A-AE5F-17F90640C5E8}"/>
               </a:ext>
             </a:extLst>
           </p:cNvPr>
@@ -22865,8 +23372,8 @@
         </p:nvSpPr>
         <p:spPr>
           <a:xfrm>
-            <a:off x="1039618" y="1828743"/>
-            <a:ext cx="8422881" cy="1323439"/>
+            <a:off x="1083527" y="1823445"/>
+            <a:ext cx="10870580" cy="369332"/>
           </a:xfrm>
           <a:prstGeom prst="rect">
             <a:avLst/>
@@ -22874,49 +23381,28 @@
           <a:noFill/>
         </p:spPr>
         <p:txBody>
-          <a:bodyPr wrap="square" rtlCol="0">
+          <a:bodyPr wrap="square">
             <a:spAutoFit/>
           </a:bodyPr>
           <a:lstStyle/>
           <a:p>
             <a:r>
-              <a:rPr lang="en-US" sz="2000" dirty="0">
-                <a:solidFill>
-                  <a:srgbClr val="0081E2"/>
-                </a:solidFill>
-                <a:latin typeface="Consolas" panose="020B0609020204030204" pitchFamily="49" charset="0"/>
-              </a:rPr>
-              <a:t>What is the computational complexity of adding an item to a stack in the worst case in terms of Big O notation?</a:t>
-            </a:r>
-            <a:endParaRPr lang="en-US" sz="2000" dirty="0">
-              <a:solidFill>
-                <a:srgbClr val="EB6E19"/>
-              </a:solidFill>
-              <a:latin typeface="Consolas" panose="020B0609020204030204" pitchFamily="49" charset="0"/>
-            </a:endParaRPr>
-          </a:p>
-          <a:p>
-            <a:endParaRPr lang="en-US" sz="2000" dirty="0">
-              <a:solidFill>
-                <a:srgbClr val="EB6E19"/>
-              </a:solidFill>
-              <a:latin typeface="Consolas" panose="020B0609020204030204" pitchFamily="49" charset="0"/>
-            </a:endParaRPr>
-          </a:p>
-          <a:p>
-            <a:endParaRPr lang="en-US" sz="2000" dirty="0">
-              <a:solidFill>
-                <a:srgbClr val="EB6E19"/>
-              </a:solidFill>
-              <a:latin typeface="Consolas" panose="020B0609020204030204" pitchFamily="49" charset="0"/>
-            </a:endParaRPr>
+              <a:rPr lang="en-US" dirty="0">
+                <a:hlinkClick r:id="rId3"/>
+              </a:rPr>
+              <a:t>https://docs.google.com/document/d/1XAUGHQE4JWmOsDkkbfTnLFoVi_QXySxC-J4XZnK4VTQ/edit?tab=t.0</a:t>
+            </a:r>
+            <a:r>
+              <a:rPr lang="en-US" dirty="0"/>
+              <a:t> </a:t>
+            </a:r>
           </a:p>
         </p:txBody>
       </p:sp>
     </p:spTree>
     <p:extLst>
       <p:ext uri="{BB962C8B-B14F-4D97-AF65-F5344CB8AC3E}">
-        <p14:creationId xmlns:p14="http://schemas.microsoft.com/office/powerpoint/2010/main" val="211684098"/>
+        <p14:creationId xmlns:p14="http://schemas.microsoft.com/office/powerpoint/2010/main" val="1488638803"/>
       </p:ext>
     </p:extLst>
   </p:cSld>
@@ -23001,7 +23487,7 @@
         <p:spPr>
           <a:xfrm>
             <a:off x="1039618" y="1828743"/>
-            <a:ext cx="8422881" cy="1631216"/>
+            <a:ext cx="8422881" cy="1323439"/>
           </a:xfrm>
           <a:prstGeom prst="rect">
             <a:avLst/>
@@ -23046,23 +23532,12 @@
               <a:latin typeface="Consolas" panose="020B0609020204030204" pitchFamily="49" charset="0"/>
             </a:endParaRPr>
           </a:p>
-          <a:p>
-            <a:r>
-              <a:rPr lang="en-US" sz="2000" dirty="0">
-                <a:solidFill>
-                  <a:srgbClr val="00DA63"/>
-                </a:solidFill>
-                <a:latin typeface="Consolas" panose="020B0609020204030204" pitchFamily="49" charset="0"/>
-              </a:rPr>
-              <a:t>Answer: O(1)</a:t>
-            </a:r>
-          </a:p>
         </p:txBody>
       </p:sp>
     </p:spTree>
     <p:extLst>
       <p:ext uri="{BB962C8B-B14F-4D97-AF65-F5344CB8AC3E}">
-        <p14:creationId xmlns:p14="http://schemas.microsoft.com/office/powerpoint/2010/main" val="4094376154"/>
+        <p14:creationId xmlns:p14="http://schemas.microsoft.com/office/powerpoint/2010/main" val="211684098"/>
       </p:ext>
     </p:extLst>
   </p:cSld>
@@ -23147,7 +23622,7 @@
         <p:spPr>
           <a:xfrm>
             <a:off x="1039618" y="1828743"/>
-            <a:ext cx="9635971" cy="1938992"/>
+            <a:ext cx="8422881" cy="1631216"/>
           </a:xfrm>
           <a:prstGeom prst="rect">
             <a:avLst/>
@@ -23155,7 +23630,7 @@
           <a:noFill/>
         </p:spPr>
         <p:txBody>
-          <a:bodyPr wrap="none" rtlCol="0">
+          <a:bodyPr wrap="square" rtlCol="0">
             <a:spAutoFit/>
           </a:bodyPr>
           <a:lstStyle/>
@@ -23167,10 +23642,8 @@
                 </a:solidFill>
                 <a:latin typeface="Consolas" panose="020B0609020204030204" pitchFamily="49" charset="0"/>
               </a:rPr>
-              <a:t>What is the computational complexity of the following code snippet?</a:t>
-            </a:r>
-          </a:p>
-          <a:p>
+              <a:t>What is the computational complexity of adding an item to a stack in the worst case in terms of Big O notation?</a:t>
+            </a:r>
             <a:endParaRPr lang="en-US" sz="2000" dirty="0">
               <a:solidFill>
                 <a:srgbClr val="EB6E19"/>
@@ -23179,92 +23652,30 @@
             </a:endParaRPr>
           </a:p>
           <a:p>
-            <a:r>
-              <a:rPr lang="en-US" sz="2000" dirty="0" err="1">
-                <a:solidFill>
-                  <a:srgbClr val="EB6E19"/>
-                </a:solidFill>
-                <a:latin typeface="Consolas" panose="020B0609020204030204" pitchFamily="49" charset="0"/>
-              </a:rPr>
-              <a:t>int</a:t>
-            </a:r>
+            <a:endParaRPr lang="en-US" sz="2000" dirty="0">
+              <a:solidFill>
+                <a:srgbClr val="EB6E19"/>
+              </a:solidFill>
+              <a:latin typeface="Consolas" panose="020B0609020204030204" pitchFamily="49" charset="0"/>
+            </a:endParaRPr>
+          </a:p>
+          <a:p>
+            <a:endParaRPr lang="en-US" sz="2000" dirty="0">
+              <a:solidFill>
+                <a:srgbClr val="EB6E19"/>
+              </a:solidFill>
+              <a:latin typeface="Consolas" panose="020B0609020204030204" pitchFamily="49" charset="0"/>
+            </a:endParaRPr>
+          </a:p>
+          <a:p>
             <a:r>
               <a:rPr lang="en-US" sz="2000" dirty="0">
                 <a:solidFill>
-                  <a:srgbClr val="EB6E19"/>
-                </a:solidFill>
-                <a:latin typeface="Consolas" panose="020B0609020204030204" pitchFamily="49" charset="0"/>
-              </a:rPr>
-              <a:t> k;</a:t>
-            </a:r>
-          </a:p>
-          <a:p>
-            <a:r>
-              <a:rPr lang="en-US" sz="2000" dirty="0">
-                <a:solidFill>
-                  <a:srgbClr val="EB6E19"/>
-                </a:solidFill>
-                <a:latin typeface="Consolas" panose="020B0609020204030204" pitchFamily="49" charset="0"/>
-              </a:rPr>
-              <a:t>for (int i=1; i &lt; n; i++)</a:t>
-            </a:r>
-          </a:p>
-          <a:p>
-            <a:r>
-              <a:rPr lang="en-US" sz="2000" dirty="0">
-                <a:solidFill>
-                  <a:srgbClr val="EB6E19"/>
-                </a:solidFill>
-                <a:latin typeface="Consolas" panose="020B0609020204030204" pitchFamily="49" charset="0"/>
-              </a:rPr>
-              <a:t>	for (</a:t>
-            </a:r>
-            <a:r>
-              <a:rPr lang="en-US" sz="2000" dirty="0" err="1">
-                <a:solidFill>
-                  <a:srgbClr val="EB6E19"/>
-                </a:solidFill>
-                <a:latin typeface="Consolas" panose="020B0609020204030204" pitchFamily="49" charset="0"/>
-              </a:rPr>
-              <a:t>int</a:t>
-            </a:r>
-            <a:r>
-              <a:rPr lang="en-US" sz="2000" dirty="0">
-                <a:solidFill>
-                  <a:srgbClr val="EB6E19"/>
-                </a:solidFill>
-                <a:latin typeface="Consolas" panose="020B0609020204030204" pitchFamily="49" charset="0"/>
-              </a:rPr>
-              <a:t> j=n; j&gt;1; j=j/2)</a:t>
-            </a:r>
-          </a:p>
-          <a:p>
-            <a:r>
-              <a:rPr lang="en-US" sz="2000" dirty="0">
-                <a:solidFill>
-                  <a:srgbClr val="EB6E19"/>
-                </a:solidFill>
-                <a:latin typeface="Consolas" panose="020B0609020204030204" pitchFamily="49" charset="0"/>
-              </a:rPr>
-              <a:t>		k = </a:t>
-            </a:r>
-            <a:r>
-              <a:rPr lang="en-US" sz="2000" dirty="0" err="1">
-                <a:solidFill>
-                  <a:srgbClr val="EB6E19"/>
-                </a:solidFill>
-                <a:latin typeface="Consolas" panose="020B0609020204030204" pitchFamily="49" charset="0"/>
-              </a:rPr>
-              <a:t>i</a:t>
-            </a:r>
-            <a:r>
-              <a:rPr lang="en-US" sz="2000" dirty="0">
-                <a:solidFill>
-                  <a:srgbClr val="EB6E19"/>
-                </a:solidFill>
-                <a:latin typeface="Consolas" panose="020B0609020204030204" pitchFamily="49" charset="0"/>
-              </a:rPr>
-              <a:t>*j;</a:t>
+                  <a:srgbClr val="00DA63"/>
+                </a:solidFill>
+                <a:latin typeface="Consolas" panose="020B0609020204030204" pitchFamily="49" charset="0"/>
+              </a:rPr>
+              <a:t>Answer: O(1)</a:t>
             </a:r>
           </a:p>
         </p:txBody>
@@ -23272,7 +23683,7 @@
     </p:spTree>
     <p:extLst>
       <p:ext uri="{BB962C8B-B14F-4D97-AF65-F5344CB8AC3E}">
-        <p14:creationId xmlns:p14="http://schemas.microsoft.com/office/powerpoint/2010/main" val="228209108"/>
+        <p14:creationId xmlns:p14="http://schemas.microsoft.com/office/powerpoint/2010/main" val="4094376154"/>
       </p:ext>
     </p:extLst>
   </p:cSld>
@@ -23357,7 +23768,7 @@
         <p:spPr>
           <a:xfrm>
             <a:off x="1039618" y="1828743"/>
-            <a:ext cx="9635971" cy="3170099"/>
+            <a:ext cx="9635971" cy="1938992"/>
           </a:xfrm>
           <a:prstGeom prst="rect">
             <a:avLst/>
@@ -23456,60 +23867,25 @@
                 </a:solidFill>
                 <a:latin typeface="Consolas" panose="020B0609020204030204" pitchFamily="49" charset="0"/>
               </a:rPr>
-              <a:t>		k = i*j;</a:t>
-            </a:r>
-          </a:p>
-          <a:p>
-            <a:endParaRPr lang="en-US" sz="2000" dirty="0">
-              <a:solidFill>
-                <a:srgbClr val="EB6E19"/>
-              </a:solidFill>
-              <a:latin typeface="Consolas" panose="020B0609020204030204" pitchFamily="49" charset="0"/>
-            </a:endParaRPr>
-          </a:p>
-          <a:p>
-            <a:endParaRPr lang="en-US" sz="2000" dirty="0">
-              <a:solidFill>
-                <a:srgbClr val="EB6E19"/>
-              </a:solidFill>
-              <a:latin typeface="Consolas" panose="020B0609020204030204" pitchFamily="49" charset="0"/>
-            </a:endParaRPr>
-          </a:p>
-          <a:p>
-            <a:endParaRPr lang="en-US" sz="2000" dirty="0">
-              <a:solidFill>
-                <a:srgbClr val="EB6E19"/>
-              </a:solidFill>
-              <a:latin typeface="Consolas" panose="020B0609020204030204" pitchFamily="49" charset="0"/>
-            </a:endParaRPr>
-          </a:p>
-          <a:p>
+              <a:t>		k = </a:t>
+            </a:r>
+            <a:r>
+              <a:rPr lang="en-US" sz="2000" dirty="0" err="1">
+                <a:solidFill>
+                  <a:srgbClr val="EB6E19"/>
+                </a:solidFill>
+                <a:latin typeface="Consolas" panose="020B0609020204030204" pitchFamily="49" charset="0"/>
+              </a:rPr>
+              <a:t>i</a:t>
+            </a:r>
             <a:r>
               <a:rPr lang="en-US" sz="2000" dirty="0">
                 <a:solidFill>
-                  <a:srgbClr val="00DA63"/>
-                </a:solidFill>
-                <a:latin typeface="Consolas" panose="020B0609020204030204" pitchFamily="49" charset="0"/>
-              </a:rPr>
-              <a:t>Answer: O(n log</a:t>
-            </a:r>
-            <a:r>
-              <a:rPr lang="en-US" sz="2000" baseline="-25000" dirty="0">
-                <a:solidFill>
-                  <a:srgbClr val="00DA63"/>
-                </a:solidFill>
-                <a:latin typeface="Consolas" panose="020B0609020204030204" pitchFamily="49" charset="0"/>
-              </a:rPr>
-              <a:t>2</a:t>
-            </a:r>
-            <a:r>
-              <a:rPr lang="en-US" sz="2000" dirty="0">
-                <a:solidFill>
-                  <a:srgbClr val="00DA63"/>
-                </a:solidFill>
-                <a:latin typeface="Consolas" panose="020B0609020204030204" pitchFamily="49" charset="0"/>
-              </a:rPr>
-              <a:t> n)</a:t>
+                  <a:srgbClr val="EB6E19"/>
+                </a:solidFill>
+                <a:latin typeface="Consolas" panose="020B0609020204030204" pitchFamily="49" charset="0"/>
+              </a:rPr>
+              <a:t>*j;</a:t>
             </a:r>
           </a:p>
         </p:txBody>
@@ -23517,7 +23893,7 @@
     </p:spTree>
     <p:extLst>
       <p:ext uri="{BB962C8B-B14F-4D97-AF65-F5344CB8AC3E}">
-        <p14:creationId xmlns:p14="http://schemas.microsoft.com/office/powerpoint/2010/main" val="2941247419"/>
+        <p14:creationId xmlns:p14="http://schemas.microsoft.com/office/powerpoint/2010/main" val="228209108"/>
       </p:ext>
     </p:extLst>
   </p:cSld>
